--- a/docs/Active_Auto_Assignment.pptx
+++ b/docs/Active_Auto_Assignment.pptx
@@ -3944,9 +3944,9 @@
                 <a:solidFill>
                   <a:schemeClr val="accent3"/>
                 </a:solidFill>
-                <a:latin typeface="Courier New" pitchFamily="34" charset="0"/>
-                <a:ea typeface="Courier New" pitchFamily="34" charset="-122"/>
-                <a:cs typeface="Courier New" pitchFamily="34" charset="-120"/>
+                <a:latin typeface="Courier New"/>
+                <a:ea typeface="Courier New"/>
+                <a:cs typeface="Courier New"/>
               </a:rPr>
               <a:t>System.schedule('Active Auto Assignment',</a:t>
             </a:r>
@@ -3961,9 +3961,9 @@
                 <a:solidFill>
                   <a:schemeClr val="accent3"/>
                 </a:solidFill>
-                <a:latin typeface="Courier New" pitchFamily="34" charset="0"/>
-                <a:ea typeface="Courier New" pitchFamily="34" charset="-122"/>
-                <a:cs typeface="Courier New" pitchFamily="34" charset="-120"/>
+                <a:latin typeface="Courier New"/>
+                <a:ea typeface="Courier New"/>
+                <a:cs typeface="Courier New"/>
               </a:rPr>
               <a:t>    '0 0 9 * * ?', new Active_Assignment_sc());</a:t>
             </a:r>
@@ -4146,16 +4146,16 @@
                           <a:solidFill>
                             <a:srgbClr val="FFFFFF"/>
                           </a:solidFill>
-                          <a:latin typeface="Malgun Gothic" pitchFamily="34" charset="0"/>
-                          <a:ea typeface="Malgun Gothic" pitchFamily="34" charset="-122"/>
-                          <a:cs typeface="Malgun Gothic" pitchFamily="34" charset="-120"/>
+                          <a:latin typeface="Malgun Gothic" panose="020B0503020000020004" pitchFamily="34" charset="-127"/>
+                          <a:ea typeface="Malgun Gothic" panose="020B0503020000020004" pitchFamily="34" charset="-127"/>
+                          <a:cs typeface="Malgun Gothic" panose="020B0503020000020004" pitchFamily="34" charset="-127"/>
                         </a:rPr>
                         <a:t>설정</a:t>
                       </a:r>
                       <a:endParaRPr lang="en-US" sz="1100" dirty="0">
-                        <a:latin typeface="Malgun Gothic" charset="0"/>
-                        <a:ea typeface="Malgun Gothic" charset="0"/>
-                        <a:cs typeface="Malgun Gothic" charset="0"/>
+                        <a:latin typeface="Malgun Gothic" panose="020B0503020000020004" pitchFamily="34" charset="-127"/>
+                        <a:ea typeface="Malgun Gothic" panose="020B0503020000020004" pitchFamily="34" charset="-127"/>
+                        <a:cs typeface="Malgun Gothic" panose="020B0503020000020004" pitchFamily="34" charset="-127"/>
                       </a:endParaRPr>
                     </a:p>
                   </a:txBody>
@@ -4214,16 +4214,16 @@
                           <a:solidFill>
                             <a:srgbClr val="FFFFFF"/>
                           </a:solidFill>
-                          <a:latin typeface="Malgun Gothic" pitchFamily="34" charset="0"/>
-                          <a:ea typeface="Malgun Gothic" pitchFamily="34" charset="-122"/>
-                          <a:cs typeface="Malgun Gothic" pitchFamily="34" charset="-120"/>
+                          <a:latin typeface="Malgun Gothic" panose="020B0503020000020004" pitchFamily="34" charset="-127"/>
+                          <a:ea typeface="Malgun Gothic" panose="020B0503020000020004" pitchFamily="34" charset="-127"/>
+                          <a:cs typeface="Malgun Gothic" panose="020B0503020000020004" pitchFamily="34" charset="-127"/>
                         </a:rPr>
                         <a:t>용도</a:t>
                       </a:r>
                       <a:endParaRPr lang="en-US" sz="1100" dirty="0">
-                        <a:latin typeface="Malgun Gothic" charset="0"/>
-                        <a:ea typeface="Malgun Gothic" charset="0"/>
-                        <a:cs typeface="Malgun Gothic" charset="0"/>
+                        <a:latin typeface="Malgun Gothic" panose="020B0503020000020004" pitchFamily="34" charset="-127"/>
+                        <a:ea typeface="Malgun Gothic" panose="020B0503020000020004" pitchFamily="34" charset="-127"/>
+                        <a:cs typeface="Malgun Gothic" panose="020B0503020000020004" pitchFamily="34" charset="-127"/>
                       </a:endParaRPr>
                     </a:p>
                   </a:txBody>
@@ -4284,16 +4284,16 @@
                           <a:solidFill>
                             <a:srgbClr val="1F2937"/>
                           </a:solidFill>
-                          <a:latin typeface="Malgun Gothic" pitchFamily="34" charset="0"/>
-                          <a:ea typeface="Malgun Gothic" pitchFamily="34" charset="-122"/>
-                          <a:cs typeface="Malgun Gothic" pitchFamily="34" charset="-120"/>
+                          <a:latin typeface="Malgun Gothic" panose="020B0503020000020004" pitchFamily="34" charset="-127"/>
+                          <a:ea typeface="Malgun Gothic" panose="020B0503020000020004" pitchFamily="34" charset="-127"/>
+                          <a:cs typeface="Malgun Gothic" panose="020B0503020000020004" pitchFamily="34" charset="-127"/>
                         </a:rPr>
                         <a:t>Custom Label</a:t>
                       </a:r>
                       <a:endParaRPr lang="en-US" sz="1000" dirty="0">
-                        <a:latin typeface="Malgun Gothic" charset="0"/>
-                        <a:ea typeface="Malgun Gothic" charset="0"/>
-                        <a:cs typeface="Malgun Gothic" charset="0"/>
+                        <a:latin typeface="Malgun Gothic" panose="020B0503020000020004" pitchFamily="34" charset="-127"/>
+                        <a:ea typeface="Malgun Gothic" panose="020B0503020000020004" pitchFamily="34" charset="-127"/>
+                        <a:cs typeface="Malgun Gothic" panose="020B0503020000020004" pitchFamily="34" charset="-127"/>
                       </a:endParaRPr>
                     </a:p>
                     <a:p>
@@ -4305,16 +4305,16 @@
                           <a:solidFill>
                             <a:srgbClr val="1F2937"/>
                           </a:solidFill>
-                          <a:latin typeface="Malgun Gothic" pitchFamily="34" charset="0"/>
-                          <a:ea typeface="Malgun Gothic" pitchFamily="34" charset="-122"/>
-                          <a:cs typeface="Malgun Gothic" pitchFamily="34" charset="-120"/>
+                          <a:latin typeface="Malgun Gothic" panose="020B0503020000020004" pitchFamily="34" charset="-127"/>
+                          <a:ea typeface="Malgun Gothic" panose="020B0503020000020004" pitchFamily="34" charset="-127"/>
+                          <a:cs typeface="Malgun Gothic" panose="020B0503020000020004" pitchFamily="34" charset="-127"/>
                         </a:rPr>
                         <a:t>MM_AssignmentFirstRegistion</a:t>
                       </a:r>
                       <a:endParaRPr lang="en-US" sz="1000" dirty="0">
-                        <a:latin typeface="Malgun Gothic" charset="0"/>
-                        <a:ea typeface="Malgun Gothic" charset="0"/>
-                        <a:cs typeface="Malgun Gothic" charset="0"/>
+                        <a:latin typeface="Malgun Gothic" panose="020B0503020000020004" pitchFamily="34" charset="-127"/>
+                        <a:ea typeface="Malgun Gothic" panose="020B0503020000020004" pitchFamily="34" charset="-127"/>
+                        <a:cs typeface="Malgun Gothic" panose="020B0503020000020004" pitchFamily="34" charset="-127"/>
                       </a:endParaRPr>
                     </a:p>
                   </a:txBody>
@@ -4373,16 +4373,16 @@
                           <a:solidFill>
                             <a:srgbClr val="1F2937"/>
                           </a:solidFill>
-                          <a:latin typeface="Malgun Gothic" pitchFamily="34" charset="0"/>
-                          <a:ea typeface="Malgun Gothic" pitchFamily="34" charset="-122"/>
-                          <a:cs typeface="Malgun Gothic" pitchFamily="34" charset="-120"/>
+                          <a:latin typeface="Malgun Gothic" panose="020B0503020000020004" pitchFamily="34" charset="-127"/>
+                          <a:ea typeface="Malgun Gothic" panose="020B0503020000020004" pitchFamily="34" charset="-127"/>
+                          <a:cs typeface="Malgun Gothic" panose="020B0503020000020004" pitchFamily="34" charset="-127"/>
                         </a:rPr>
                         <a:t>대상일 D값 (현재 10)</a:t>
                       </a:r>
                       <a:endParaRPr lang="en-US" sz="1000" dirty="0">
-                        <a:latin typeface="Malgun Gothic" charset="0"/>
-                        <a:ea typeface="Malgun Gothic" charset="0"/>
-                        <a:cs typeface="Malgun Gothic" charset="0"/>
+                        <a:latin typeface="Malgun Gothic" panose="020B0503020000020004" pitchFamily="34" charset="-127"/>
+                        <a:ea typeface="Malgun Gothic" panose="020B0503020000020004" pitchFamily="34" charset="-127"/>
+                        <a:cs typeface="Malgun Gothic" panose="020B0503020000020004" pitchFamily="34" charset="-127"/>
                       </a:endParaRPr>
                     </a:p>
                   </a:txBody>
@@ -4443,16 +4443,16 @@
                           <a:solidFill>
                             <a:srgbClr val="1F2937"/>
                           </a:solidFill>
-                          <a:latin typeface="Malgun Gothic" pitchFamily="34" charset="0"/>
-                          <a:ea typeface="Malgun Gothic" pitchFamily="34" charset="-122"/>
-                          <a:cs typeface="Malgun Gothic" pitchFamily="34" charset="-120"/>
+                          <a:latin typeface="Malgun Gothic" panose="020B0503020000020004" pitchFamily="34" charset="-127"/>
+                          <a:ea typeface="Malgun Gothic" panose="020B0503020000020004" pitchFamily="34" charset="-127"/>
+                          <a:cs typeface="Malgun Gothic" panose="020B0503020000020004" pitchFamily="34" charset="-127"/>
                         </a:rPr>
                         <a:t>Custom Setting</a:t>
                       </a:r>
                       <a:endParaRPr lang="en-US" sz="1000" dirty="0">
-                        <a:latin typeface="Malgun Gothic" charset="0"/>
-                        <a:ea typeface="Malgun Gothic" charset="0"/>
-                        <a:cs typeface="Malgun Gothic" charset="0"/>
+                        <a:latin typeface="Malgun Gothic" panose="020B0503020000020004" pitchFamily="34" charset="-127"/>
+                        <a:ea typeface="Malgun Gothic" panose="020B0503020000020004" pitchFamily="34" charset="-127"/>
+                        <a:cs typeface="Malgun Gothic" panose="020B0503020000020004" pitchFamily="34" charset="-127"/>
                       </a:endParaRPr>
                     </a:p>
                     <a:p>
@@ -4464,16 +4464,16 @@
                           <a:solidFill>
                             <a:srgbClr val="1F2937"/>
                           </a:solidFill>
-                          <a:latin typeface="Malgun Gothic" pitchFamily="34" charset="0"/>
-                          <a:ea typeface="Malgun Gothic" pitchFamily="34" charset="-122"/>
-                          <a:cs typeface="Malgun Gothic" pitchFamily="34" charset="-120"/>
+                          <a:latin typeface="Malgun Gothic" panose="020B0503020000020004" pitchFamily="34" charset="-127"/>
+                          <a:ea typeface="Malgun Gothic" panose="020B0503020000020004" pitchFamily="34" charset="-127"/>
+                          <a:cs typeface="Malgun Gothic" panose="020B0503020000020004" pitchFamily="34" charset="-127"/>
                         </a:rPr>
                         <a:t>Active_Group_Percentage__c</a:t>
                       </a:r>
                       <a:endParaRPr lang="en-US" sz="1000" dirty="0">
-                        <a:latin typeface="Malgun Gothic" charset="0"/>
-                        <a:ea typeface="Malgun Gothic" charset="0"/>
-                        <a:cs typeface="Malgun Gothic" charset="0"/>
+                        <a:latin typeface="Malgun Gothic" panose="020B0503020000020004" pitchFamily="34" charset="-127"/>
+                        <a:ea typeface="Malgun Gothic" panose="020B0503020000020004" pitchFamily="34" charset="-127"/>
+                        <a:cs typeface="Malgun Gothic" panose="020B0503020000020004" pitchFamily="34" charset="-127"/>
                       </a:endParaRPr>
                     </a:p>
                   </a:txBody>
@@ -4532,16 +4532,16 @@
                           <a:solidFill>
                             <a:srgbClr val="1F2937"/>
                           </a:solidFill>
-                          <a:latin typeface="Malgun Gothic" pitchFamily="34" charset="0"/>
-                          <a:ea typeface="Malgun Gothic" pitchFamily="34" charset="-122"/>
-                          <a:cs typeface="Malgun Gothic" pitchFamily="34" charset="-120"/>
+                          <a:latin typeface="Malgun Gothic" panose="020B0503020000020004" pitchFamily="34" charset="-127"/>
+                          <a:ea typeface="Malgun Gothic" panose="020B0503020000020004" pitchFamily="34" charset="-127"/>
+                          <a:cs typeface="Malgun Gothic" panose="020B0503020000020004" pitchFamily="34" charset="-127"/>
                         </a:rPr>
                         <a:t>등급별 할당 비율(%)</a:t>
                       </a:r>
                       <a:endParaRPr lang="en-US" sz="1000" dirty="0">
-                        <a:latin typeface="Malgun Gothic" charset="0"/>
-                        <a:ea typeface="Malgun Gothic" charset="0"/>
-                        <a:cs typeface="Malgun Gothic" charset="0"/>
+                        <a:latin typeface="Malgun Gothic" panose="020B0503020000020004" pitchFamily="34" charset="-127"/>
+                        <a:ea typeface="Malgun Gothic" panose="020B0503020000020004" pitchFamily="34" charset="-127"/>
+                        <a:cs typeface="Malgun Gothic" panose="020B0503020000020004" pitchFamily="34" charset="-127"/>
                       </a:endParaRPr>
                     </a:p>
                   </a:txBody>
@@ -4602,16 +4602,16 @@
                           <a:solidFill>
                             <a:srgbClr val="1F2937"/>
                           </a:solidFill>
-                          <a:latin typeface="Malgun Gothic" pitchFamily="34" charset="0"/>
-                          <a:ea typeface="Malgun Gothic" pitchFamily="34" charset="-122"/>
-                          <a:cs typeface="Malgun Gothic" pitchFamily="34" charset="-120"/>
+                          <a:latin typeface="Malgun Gothic" panose="020B0503020000020004" pitchFamily="34" charset="-127"/>
+                          <a:ea typeface="Malgun Gothic" panose="020B0503020000020004" pitchFamily="34" charset="-127"/>
+                          <a:cs typeface="Malgun Gothic" panose="020B0503020000020004" pitchFamily="34" charset="-127"/>
                         </a:rPr>
                         <a:t>User.X3P_Active__c</a:t>
                       </a:r>
                       <a:endParaRPr lang="en-US" sz="1000" dirty="0">
-                        <a:latin typeface="Malgun Gothic" charset="0"/>
-                        <a:ea typeface="Malgun Gothic" charset="0"/>
-                        <a:cs typeface="Malgun Gothic" charset="0"/>
+                        <a:latin typeface="Malgun Gothic" panose="020B0503020000020004" pitchFamily="34" charset="-127"/>
+                        <a:ea typeface="Malgun Gothic" panose="020B0503020000020004" pitchFamily="34" charset="-127"/>
+                        <a:cs typeface="Malgun Gothic" panose="020B0503020000020004" pitchFamily="34" charset="-127"/>
                       </a:endParaRPr>
                     </a:p>
                   </a:txBody>
@@ -4670,16 +4670,16 @@
                           <a:solidFill>
                             <a:srgbClr val="1F2937"/>
                           </a:solidFill>
-                          <a:latin typeface="Malgun Gothic" pitchFamily="34" charset="0"/>
-                          <a:ea typeface="Malgun Gothic" pitchFamily="34" charset="-122"/>
-                          <a:cs typeface="Malgun Gothic" pitchFamily="34" charset="-120"/>
+                          <a:latin typeface="Malgun Gothic" panose="020B0503020000020004" pitchFamily="34" charset="-127"/>
+                          <a:ea typeface="Malgun Gothic" panose="020B0503020000020004" pitchFamily="34" charset="-127"/>
+                          <a:cs typeface="Malgun Gothic" panose="020B0503020000020004" pitchFamily="34" charset="-127"/>
                         </a:rPr>
                         <a:t>사용자 등급 (A/B/C)</a:t>
                       </a:r>
                       <a:endParaRPr lang="en-US" sz="1000" dirty="0">
-                        <a:latin typeface="Malgun Gothic" charset="0"/>
-                        <a:ea typeface="Malgun Gothic" charset="0"/>
-                        <a:cs typeface="Malgun Gothic" charset="0"/>
+                        <a:latin typeface="Malgun Gothic" panose="020B0503020000020004" pitchFamily="34" charset="-127"/>
+                        <a:ea typeface="Malgun Gothic" panose="020B0503020000020004" pitchFamily="34" charset="-127"/>
+                        <a:cs typeface="Malgun Gothic" panose="020B0503020000020004" pitchFamily="34" charset="-127"/>
                       </a:endParaRPr>
                     </a:p>
                   </a:txBody>
@@ -4740,16 +4740,16 @@
                           <a:solidFill>
                             <a:srgbClr val="1F2937"/>
                           </a:solidFill>
-                          <a:latin typeface="Malgun Gothic" pitchFamily="34" charset="0"/>
-                          <a:ea typeface="Malgun Gothic" pitchFamily="34" charset="-122"/>
-                          <a:cs typeface="Malgun Gothic" pitchFamily="34" charset="-120"/>
+                          <a:latin typeface="Malgun Gothic" panose="020B0503020000020004" pitchFamily="34" charset="-127"/>
+                          <a:ea typeface="Malgun Gothic" panose="020B0503020000020004" pitchFamily="34" charset="-127"/>
+                          <a:cs typeface="Malgun Gothic" panose="020B0503020000020004" pitchFamily="34" charset="-127"/>
                         </a:rPr>
                         <a:t>Event Type 휴가(연차/반차)</a:t>
                       </a:r>
                       <a:endParaRPr lang="en-US" sz="1000" dirty="0">
-                        <a:latin typeface="Malgun Gothic" charset="0"/>
-                        <a:ea typeface="Malgun Gothic" charset="0"/>
-                        <a:cs typeface="Malgun Gothic" charset="0"/>
+                        <a:latin typeface="Malgun Gothic" panose="020B0503020000020004" pitchFamily="34" charset="-127"/>
+                        <a:ea typeface="Malgun Gothic" panose="020B0503020000020004" pitchFamily="34" charset="-127"/>
+                        <a:cs typeface="Malgun Gothic" panose="020B0503020000020004" pitchFamily="34" charset="-127"/>
                       </a:endParaRPr>
                     </a:p>
                   </a:txBody>
@@ -4808,16 +4808,16 @@
                           <a:solidFill>
                             <a:srgbClr val="1F2937"/>
                           </a:solidFill>
-                          <a:latin typeface="Malgun Gothic" pitchFamily="34" charset="0"/>
-                          <a:ea typeface="Malgun Gothic" pitchFamily="34" charset="-122"/>
-                          <a:cs typeface="Malgun Gothic" pitchFamily="34" charset="-120"/>
+                          <a:latin typeface="Malgun Gothic" panose="020B0503020000020004" pitchFamily="34" charset="-127"/>
+                          <a:ea typeface="Malgun Gothic" panose="020B0503020000020004" pitchFamily="34" charset="-127"/>
+                          <a:cs typeface="Malgun Gothic" panose="020B0503020000020004" pitchFamily="34" charset="-127"/>
                         </a:rPr>
                         <a:t>당일 할당 제외</a:t>
                       </a:r>
                       <a:endParaRPr lang="en-US" sz="1000" dirty="0">
-                        <a:latin typeface="Malgun Gothic" charset="0"/>
-                        <a:ea typeface="Malgun Gothic" charset="0"/>
-                        <a:cs typeface="Malgun Gothic" charset="0"/>
+                        <a:latin typeface="Malgun Gothic" panose="020B0503020000020004" pitchFamily="34" charset="-127"/>
+                        <a:ea typeface="Malgun Gothic" panose="020B0503020000020004" pitchFamily="34" charset="-127"/>
+                        <a:cs typeface="Malgun Gothic" panose="020B0503020000020004" pitchFamily="34" charset="-127"/>
                       </a:endParaRPr>
                     </a:p>
                   </a:txBody>
@@ -4878,16 +4878,16 @@
                           <a:solidFill>
                             <a:srgbClr val="1F2937"/>
                           </a:solidFill>
-                          <a:latin typeface="Malgun Gothic" pitchFamily="34" charset="0"/>
-                          <a:ea typeface="Malgun Gothic" pitchFamily="34" charset="-122"/>
-                          <a:cs typeface="Malgun Gothic" pitchFamily="34" charset="-120"/>
+                          <a:latin typeface="Malgun Gothic" panose="020B0503020000020004" pitchFamily="34" charset="-127"/>
+                          <a:ea typeface="Malgun Gothic" panose="020B0503020000020004" pitchFamily="34" charset="-127"/>
+                          <a:cs typeface="Malgun Gothic" panose="020B0503020000020004" pitchFamily="34" charset="-127"/>
                         </a:rPr>
                         <a:t>Helper.EMAIL_RECEIVERS</a:t>
                       </a:r>
                       <a:endParaRPr lang="en-US" sz="1000" dirty="0">
-                        <a:latin typeface="Malgun Gothic" charset="0"/>
-                        <a:ea typeface="Malgun Gothic" charset="0"/>
-                        <a:cs typeface="Malgun Gothic" charset="0"/>
+                        <a:latin typeface="Malgun Gothic" panose="020B0503020000020004" pitchFamily="34" charset="-127"/>
+                        <a:ea typeface="Malgun Gothic" panose="020B0503020000020004" pitchFamily="34" charset="-127"/>
+                        <a:cs typeface="Malgun Gothic" panose="020B0503020000020004" pitchFamily="34" charset="-127"/>
                       </a:endParaRPr>
                     </a:p>
                   </a:txBody>
@@ -4946,16 +4946,16 @@
                           <a:solidFill>
                             <a:srgbClr val="1F2937"/>
                           </a:solidFill>
-                          <a:latin typeface="Malgun Gothic" pitchFamily="34" charset="0"/>
-                          <a:ea typeface="Malgun Gothic" pitchFamily="34" charset="-122"/>
-                          <a:cs typeface="Malgun Gothic" pitchFamily="34" charset="-120"/>
+                          <a:latin typeface="Malgun Gothic" panose="020B0503020000020004" pitchFamily="34" charset="-127"/>
+                          <a:ea typeface="Malgun Gothic" panose="020B0503020000020004" pitchFamily="34" charset="-127"/>
+                          <a:cs typeface="Malgun Gothic" panose="020B0503020000020004" pitchFamily="34" charset="-127"/>
                         </a:rPr>
                         <a:t>리포트 수신자 (코드 상수)</a:t>
                       </a:r>
                       <a:endParaRPr lang="en-US" sz="1000" dirty="0">
-                        <a:latin typeface="Malgun Gothic" charset="0"/>
-                        <a:ea typeface="Malgun Gothic" charset="0"/>
-                        <a:cs typeface="Malgun Gothic" charset="0"/>
+                        <a:latin typeface="Malgun Gothic" panose="020B0503020000020004" pitchFamily="34" charset="-127"/>
+                        <a:ea typeface="Malgun Gothic" panose="020B0503020000020004" pitchFamily="34" charset="-127"/>
+                        <a:cs typeface="Malgun Gothic" panose="020B0503020000020004" pitchFamily="34" charset="-127"/>
                       </a:endParaRPr>
                     </a:p>
                   </a:txBody>
@@ -5191,16 +5191,16 @@
                           <a:solidFill>
                             <a:srgbClr val="FFFFFF"/>
                           </a:solidFill>
-                          <a:latin typeface="Malgun Gothic" pitchFamily="34" charset="0"/>
-                          <a:ea typeface="Malgun Gothic" pitchFamily="34" charset="-122"/>
-                          <a:cs typeface="Malgun Gothic" pitchFamily="34" charset="-120"/>
+                          <a:latin typeface="Malgun Gothic" panose="020B0503020000020004" pitchFamily="34" charset="-127"/>
+                          <a:ea typeface="Malgun Gothic" panose="020B0503020000020004" pitchFamily="34" charset="-127"/>
+                          <a:cs typeface="Malgun Gothic" panose="020B0503020000020004" pitchFamily="34" charset="-127"/>
                         </a:rPr>
                         <a:t>영향</a:t>
                       </a:r>
                       <a:endParaRPr lang="en-US" sz="1100" dirty="0">
-                        <a:latin typeface="Malgun Gothic" charset="0"/>
-                        <a:ea typeface="Malgun Gothic" charset="0"/>
-                        <a:cs typeface="Malgun Gothic" charset="0"/>
+                        <a:latin typeface="Malgun Gothic" panose="020B0503020000020004" pitchFamily="34" charset="-127"/>
+                        <a:ea typeface="Malgun Gothic" panose="020B0503020000020004" pitchFamily="34" charset="-127"/>
+                        <a:cs typeface="Malgun Gothic" panose="020B0503020000020004" pitchFamily="34" charset="-127"/>
                       </a:endParaRPr>
                     </a:p>
                   </a:txBody>
@@ -5259,16 +5259,16 @@
                           <a:solidFill>
                             <a:srgbClr val="FFFFFF"/>
                           </a:solidFill>
-                          <a:latin typeface="Malgun Gothic" pitchFamily="34" charset="0"/>
-                          <a:ea typeface="Malgun Gothic" pitchFamily="34" charset="-122"/>
-                          <a:cs typeface="Malgun Gothic" pitchFamily="34" charset="-120"/>
+                          <a:latin typeface="Malgun Gothic" panose="020B0503020000020004" pitchFamily="34" charset="-127"/>
+                          <a:ea typeface="Malgun Gothic" panose="020B0503020000020004" pitchFamily="34" charset="-127"/>
+                          <a:cs typeface="Malgun Gothic" panose="020B0503020000020004" pitchFamily="34" charset="-127"/>
                         </a:rPr>
                         <a:t>내용</a:t>
                       </a:r>
                       <a:endParaRPr lang="en-US" sz="1100" dirty="0">
-                        <a:latin typeface="Malgun Gothic" charset="0"/>
-                        <a:ea typeface="Malgun Gothic" charset="0"/>
-                        <a:cs typeface="Malgun Gothic" charset="0"/>
+                        <a:latin typeface="Malgun Gothic" panose="020B0503020000020004" pitchFamily="34" charset="-127"/>
+                        <a:ea typeface="Malgun Gothic" panose="020B0503020000020004" pitchFamily="34" charset="-127"/>
+                        <a:cs typeface="Malgun Gothic" panose="020B0503020000020004" pitchFamily="34" charset="-127"/>
                       </a:endParaRPr>
                     </a:p>
                   </a:txBody>
@@ -5327,16 +5327,16 @@
                           <a:solidFill>
                             <a:srgbClr val="FFFFFF"/>
                           </a:solidFill>
-                          <a:latin typeface="Malgun Gothic" pitchFamily="34" charset="0"/>
-                          <a:ea typeface="Malgun Gothic" pitchFamily="34" charset="-122"/>
-                          <a:cs typeface="Malgun Gothic" pitchFamily="34" charset="-120"/>
+                          <a:latin typeface="Malgun Gothic" panose="020B0503020000020004" pitchFamily="34" charset="-127"/>
+                          <a:ea typeface="Malgun Gothic" panose="020B0503020000020004" pitchFamily="34" charset="-127"/>
+                          <a:cs typeface="Malgun Gothic" panose="020B0503020000020004" pitchFamily="34" charset="-127"/>
                         </a:rPr>
                         <a:t>제안</a:t>
                       </a:r>
                       <a:endParaRPr lang="en-US" sz="1100" dirty="0">
-                        <a:latin typeface="Malgun Gothic" charset="0"/>
-                        <a:ea typeface="Malgun Gothic" charset="0"/>
-                        <a:cs typeface="Malgun Gothic" charset="0"/>
+                        <a:latin typeface="Malgun Gothic" panose="020B0503020000020004" pitchFamily="34" charset="-127"/>
+                        <a:ea typeface="Malgun Gothic" panose="020B0503020000020004" pitchFamily="34" charset="-127"/>
+                        <a:cs typeface="Malgun Gothic" panose="020B0503020000020004" pitchFamily="34" charset="-127"/>
                       </a:endParaRPr>
                     </a:p>
                   </a:txBody>
@@ -5397,16 +5397,16 @@
                           <a:solidFill>
                             <a:srgbClr val="1F2937"/>
                           </a:solidFill>
-                          <a:latin typeface="Malgun Gothic" pitchFamily="34" charset="0"/>
-                          <a:ea typeface="Malgun Gothic" pitchFamily="34" charset="-122"/>
-                          <a:cs typeface="Malgun Gothic" pitchFamily="34" charset="-120"/>
+                          <a:latin typeface="Malgun Gothic" panose="020B0503020000020004" pitchFamily="34" charset="-127"/>
+                          <a:ea typeface="Malgun Gothic" panose="020B0503020000020004" pitchFamily="34" charset="-127"/>
+                          <a:cs typeface="Malgun Gothic" panose="020B0503020000020004" pitchFamily="34" charset="-127"/>
                         </a:rPr>
                         <a:t>높음</a:t>
                       </a:r>
                       <a:endParaRPr lang="en-US" sz="950" dirty="0">
-                        <a:latin typeface="Malgun Gothic" charset="0"/>
-                        <a:ea typeface="Malgun Gothic" charset="0"/>
-                        <a:cs typeface="Malgun Gothic" charset="0"/>
+                        <a:latin typeface="Malgun Gothic" panose="020B0503020000020004" pitchFamily="34" charset="-127"/>
+                        <a:ea typeface="Malgun Gothic" panose="020B0503020000020004" pitchFamily="34" charset="-127"/>
+                        <a:cs typeface="Malgun Gothic" panose="020B0503020000020004" pitchFamily="34" charset="-127"/>
                       </a:endParaRPr>
                     </a:p>
                   </a:txBody>
@@ -5465,16 +5465,16 @@
                           <a:solidFill>
                             <a:srgbClr val="1F2937"/>
                           </a:solidFill>
-                          <a:latin typeface="Malgun Gothic" pitchFamily="34" charset="0"/>
-                          <a:ea typeface="Malgun Gothic" pitchFamily="34" charset="-122"/>
-                          <a:cs typeface="Malgun Gothic" pitchFamily="34" charset="-120"/>
+                          <a:latin typeface="Malgun Gothic" panose="020B0503020000020004" pitchFamily="34" charset="-127"/>
+                          <a:ea typeface="Malgun Gothic" panose="020B0503020000020004" pitchFamily="34" charset="-127"/>
+                          <a:cs typeface="Malgun Gothic" panose="020B0503020000020004" pitchFamily="34" charset="-127"/>
                         </a:rPr>
                         <a:t>02_ba에서 allocator.next()를 먼저 호출한 뒤 '유한회사'를 제외 → 제외 건도 할당량을 1건 소진하고, 어떤 건수에도 집계되지 않음</a:t>
                       </a:r>
                       <a:endParaRPr lang="en-US" sz="950" dirty="0">
-                        <a:latin typeface="Malgun Gothic" charset="0"/>
-                        <a:ea typeface="Malgun Gothic" charset="0"/>
-                        <a:cs typeface="Malgun Gothic" charset="0"/>
+                        <a:latin typeface="Malgun Gothic" panose="020B0503020000020004" pitchFamily="34" charset="-127"/>
+                        <a:ea typeface="Malgun Gothic" panose="020B0503020000020004" pitchFamily="34" charset="-127"/>
+                        <a:cs typeface="Malgun Gothic" panose="020B0503020000020004" pitchFamily="34" charset="-127"/>
                       </a:endParaRPr>
                     </a:p>
                   </a:txBody>
@@ -5533,16 +5533,16 @@
                           <a:solidFill>
                             <a:srgbClr val="1F2937"/>
                           </a:solidFill>
-                          <a:latin typeface="Malgun Gothic" pitchFamily="34" charset="0"/>
-                          <a:ea typeface="Malgun Gothic" pitchFamily="34" charset="-122"/>
-                          <a:cs typeface="Malgun Gothic" pitchFamily="34" charset="-120"/>
+                          <a:latin typeface="Malgun Gothic" panose="020B0503020000020004" pitchFamily="34" charset="-127"/>
+                          <a:ea typeface="Malgun Gothic" panose="020B0503020000020004" pitchFamily="34" charset="-127"/>
+                          <a:cs typeface="Malgun Gothic" panose="020B0503020000020004" pitchFamily="34" charset="-127"/>
                         </a:rPr>
                         <a:t>next() 호출 전에 제외하거나 쿼리에 Name NOT LIKE '%유한회사%' 추가</a:t>
                       </a:r>
                       <a:endParaRPr lang="en-US" sz="950" dirty="0">
-                        <a:latin typeface="Malgun Gothic" charset="0"/>
-                        <a:ea typeface="Malgun Gothic" charset="0"/>
-                        <a:cs typeface="Malgun Gothic" charset="0"/>
+                        <a:latin typeface="Malgun Gothic" panose="020B0503020000020004" pitchFamily="34" charset="-127"/>
+                        <a:ea typeface="Malgun Gothic" panose="020B0503020000020004" pitchFamily="34" charset="-127"/>
+                        <a:cs typeface="Malgun Gothic" panose="020B0503020000020004" pitchFamily="34" charset="-127"/>
                       </a:endParaRPr>
                     </a:p>
                   </a:txBody>
@@ -5603,16 +5603,16 @@
                           <a:solidFill>
                             <a:srgbClr val="1F2937"/>
                           </a:solidFill>
-                          <a:latin typeface="Malgun Gothic" pitchFamily="34" charset="0"/>
-                          <a:ea typeface="Malgun Gothic" pitchFamily="34" charset="-122"/>
-                          <a:cs typeface="Malgun Gothic" pitchFamily="34" charset="-120"/>
+                          <a:latin typeface="Malgun Gothic" panose="020B0503020000020004" pitchFamily="34" charset="-127"/>
+                          <a:ea typeface="Malgun Gothic" panose="020B0503020000020004" pitchFamily="34" charset="-127"/>
+                          <a:cs typeface="Malgun Gothic" panose="020B0503020000020004" pitchFamily="34" charset="-127"/>
                         </a:rPr>
                         <a:t>중간</a:t>
                       </a:r>
                       <a:endParaRPr lang="en-US" sz="950" dirty="0">
-                        <a:latin typeface="Malgun Gothic" charset="0"/>
-                        <a:ea typeface="Malgun Gothic" charset="0"/>
-                        <a:cs typeface="Malgun Gothic" charset="0"/>
+                        <a:latin typeface="Malgun Gothic" panose="020B0503020000020004" pitchFamily="34" charset="-127"/>
+                        <a:ea typeface="Malgun Gothic" panose="020B0503020000020004" pitchFamily="34" charset="-127"/>
+                        <a:cs typeface="Malgun Gothic" panose="020B0503020000020004" pitchFamily="34" charset="-127"/>
                       </a:endParaRPr>
                     </a:p>
                   </a:txBody>
@@ -5671,16 +5671,16 @@
                           <a:solidFill>
                             <a:srgbClr val="1F2937"/>
                           </a:solidFill>
-                          <a:latin typeface="Malgun Gothic" pitchFamily="34" charset="0"/>
-                          <a:ea typeface="Malgun Gothic" pitchFamily="34" charset="-122"/>
-                          <a:cs typeface="Malgun Gothic" pitchFamily="34" charset="-120"/>
+                          <a:latin typeface="Malgun Gothic" panose="020B0503020000020004" pitchFamily="34" charset="-127"/>
+                          <a:ea typeface="Malgun Gothic" panose="020B0503020000020004" pitchFamily="34" charset="-127"/>
+                          <a:cs typeface="Malgun Gothic" panose="020B0503020000020004" pitchFamily="34" charset="-127"/>
                         </a:rPr>
                         <a:t>Account_tr의 즉시 Won은 Close Date를 바꾸지 않음 (배치는 오늘로 변경) → 처리 경로에 따라 Won 기회의 Close Date 기준이 다름</a:t>
                       </a:r>
                       <a:endParaRPr lang="en-US" sz="950" dirty="0">
-                        <a:latin typeface="Malgun Gothic" charset="0"/>
-                        <a:ea typeface="Malgun Gothic" charset="0"/>
-                        <a:cs typeface="Malgun Gothic" charset="0"/>
+                        <a:latin typeface="Malgun Gothic" panose="020B0503020000020004" pitchFamily="34" charset="-127"/>
+                        <a:ea typeface="Malgun Gothic" panose="020B0503020000020004" pitchFamily="34" charset="-127"/>
+                        <a:cs typeface="Malgun Gothic" panose="020B0503020000020004" pitchFamily="34" charset="-127"/>
                       </a:endParaRPr>
                     </a:p>
                   </a:txBody>
@@ -5739,16 +5739,16 @@
                           <a:solidFill>
                             <a:srgbClr val="1F2937"/>
                           </a:solidFill>
-                          <a:latin typeface="Malgun Gothic" pitchFamily="34" charset="0"/>
-                          <a:ea typeface="Malgun Gothic" pitchFamily="34" charset="-122"/>
-                          <a:cs typeface="Malgun Gothic" pitchFamily="34" charset="-120"/>
+                          <a:latin typeface="Malgun Gothic" panose="020B0503020000020004" pitchFamily="34" charset="-127"/>
+                          <a:ea typeface="Malgun Gothic" panose="020B0503020000020004" pitchFamily="34" charset="-127"/>
+                          <a:cs typeface="Malgun Gothic" panose="020B0503020000020004" pitchFamily="34" charset="-127"/>
                         </a:rPr>
                         <a:t>트리거에서도 CloseDate = 오늘 설정</a:t>
                       </a:r>
                       <a:endParaRPr lang="en-US" sz="950" dirty="0">
-                        <a:latin typeface="Malgun Gothic" charset="0"/>
-                        <a:ea typeface="Malgun Gothic" charset="0"/>
-                        <a:cs typeface="Malgun Gothic" charset="0"/>
+                        <a:latin typeface="Malgun Gothic" panose="020B0503020000020004" pitchFamily="34" charset="-127"/>
+                        <a:ea typeface="Malgun Gothic" panose="020B0503020000020004" pitchFamily="34" charset="-127"/>
+                        <a:cs typeface="Malgun Gothic" panose="020B0503020000020004" pitchFamily="34" charset="-127"/>
                       </a:endParaRPr>
                     </a:p>
                   </a:txBody>
@@ -5809,16 +5809,16 @@
                           <a:solidFill>
                             <a:srgbClr val="1F2937"/>
                           </a:solidFill>
-                          <a:latin typeface="Malgun Gothic" pitchFamily="34" charset="0"/>
-                          <a:ea typeface="Malgun Gothic" pitchFamily="34" charset="-122"/>
-                          <a:cs typeface="Malgun Gothic" pitchFamily="34" charset="-120"/>
+                          <a:latin typeface="Malgun Gothic" panose="020B0503020000020004" pitchFamily="34" charset="-127"/>
+                          <a:ea typeface="Malgun Gothic" panose="020B0503020000020004" pitchFamily="34" charset="-127"/>
+                          <a:cs typeface="Malgun Gothic" panose="020B0503020000020004" pitchFamily="34" charset="-127"/>
                         </a:rPr>
                         <a:t>중간</a:t>
                       </a:r>
                       <a:endParaRPr lang="en-US" sz="950" dirty="0">
-                        <a:latin typeface="Malgun Gothic" charset="0"/>
-                        <a:ea typeface="Malgun Gothic" charset="0"/>
-                        <a:cs typeface="Malgun Gothic" charset="0"/>
+                        <a:latin typeface="Malgun Gothic" panose="020B0503020000020004" pitchFamily="34" charset="-127"/>
+                        <a:ea typeface="Malgun Gothic" panose="020B0503020000020004" pitchFamily="34" charset="-127"/>
+                        <a:cs typeface="Malgun Gothic" panose="020B0503020000020004" pitchFamily="34" charset="-127"/>
                       </a:endParaRPr>
                     </a:p>
                   </a:txBody>
@@ -5877,16 +5877,16 @@
                           <a:solidFill>
                             <a:srgbClr val="1F2937"/>
                           </a:solidFill>
-                          <a:latin typeface="Malgun Gothic" pitchFamily="34" charset="0"/>
-                          <a:ea typeface="Malgun Gothic" pitchFamily="34" charset="-122"/>
-                          <a:cs typeface="Malgun Gothic" pitchFamily="34" charset="-120"/>
+                          <a:latin typeface="Malgun Gothic" panose="020B0503020000020004" pitchFamily="34" charset="-127"/>
+                          <a:ea typeface="Malgun Gothic" panose="020B0503020000020004" pitchFamily="34" charset="-127"/>
+                          <a:cs typeface="Malgun Gothic" panose="020B0503020000020004" pitchFamily="34" charset="-127"/>
                         </a:rPr>
                         <a:t>CloseOppty_ba는 업데이트 실패를 System.debug로만 남김 → 종료 실패를 운영자가 알 수 없음</a:t>
                       </a:r>
                       <a:endParaRPr lang="en-US" sz="950" dirty="0">
-                        <a:latin typeface="Malgun Gothic" charset="0"/>
-                        <a:ea typeface="Malgun Gothic" charset="0"/>
-                        <a:cs typeface="Malgun Gothic" charset="0"/>
+                        <a:latin typeface="Malgun Gothic" panose="020B0503020000020004" pitchFamily="34" charset="-127"/>
+                        <a:ea typeface="Malgun Gothic" panose="020B0503020000020004" pitchFamily="34" charset="-127"/>
+                        <a:cs typeface="Malgun Gothic" panose="020B0503020000020004" pitchFamily="34" charset="-127"/>
                       </a:endParaRPr>
                     </a:p>
                   </a:txBody>
@@ -5945,16 +5945,16 @@
                           <a:solidFill>
                             <a:srgbClr val="1F2937"/>
                           </a:solidFill>
-                          <a:latin typeface="Malgun Gothic" pitchFamily="34" charset="0"/>
-                          <a:ea typeface="Malgun Gothic" pitchFamily="34" charset="-122"/>
-                          <a:cs typeface="Malgun Gothic" pitchFamily="34" charset="-120"/>
+                          <a:latin typeface="Malgun Gothic" panose="020B0503020000020004" pitchFamily="34" charset="-127"/>
+                          <a:ea typeface="Malgun Gothic" panose="020B0503020000020004" pitchFamily="34" charset="-127"/>
+                          <a:cs typeface="Malgun Gothic" panose="020B0503020000020004" pitchFamily="34" charset="-127"/>
                         </a:rPr>
                         <a:t>오류 수집 후 finish에서 메일 발송</a:t>
                       </a:r>
                       <a:endParaRPr lang="en-US" sz="950" dirty="0">
-                        <a:latin typeface="Malgun Gothic" charset="0"/>
-                        <a:ea typeface="Malgun Gothic" charset="0"/>
-                        <a:cs typeface="Malgun Gothic" charset="0"/>
+                        <a:latin typeface="Malgun Gothic" panose="020B0503020000020004" pitchFamily="34" charset="-127"/>
+                        <a:ea typeface="Malgun Gothic" panose="020B0503020000020004" pitchFamily="34" charset="-127"/>
+                        <a:cs typeface="Malgun Gothic" panose="020B0503020000020004" pitchFamily="34" charset="-127"/>
                       </a:endParaRPr>
                     </a:p>
                   </a:txBody>
@@ -6015,16 +6015,16 @@
                           <a:solidFill>
                             <a:srgbClr val="1F2937"/>
                           </a:solidFill>
-                          <a:latin typeface="Malgun Gothic" pitchFamily="34" charset="0"/>
-                          <a:ea typeface="Malgun Gothic" pitchFamily="34" charset="-122"/>
-                          <a:cs typeface="Malgun Gothic" pitchFamily="34" charset="-120"/>
+                          <a:latin typeface="Malgun Gothic" panose="020B0503020000020004" pitchFamily="34" charset="-127"/>
+                          <a:ea typeface="Malgun Gothic" panose="020B0503020000020004" pitchFamily="34" charset="-127"/>
+                          <a:cs typeface="Malgun Gothic" panose="020B0503020000020004" pitchFamily="34" charset="-127"/>
                         </a:rPr>
                         <a:t>중간</a:t>
                       </a:r>
                       <a:endParaRPr lang="en-US" sz="950" dirty="0">
-                        <a:latin typeface="Malgun Gothic" charset="0"/>
-                        <a:ea typeface="Malgun Gothic" charset="0"/>
-                        <a:cs typeface="Malgun Gothic" charset="0"/>
+                        <a:latin typeface="Malgun Gothic" panose="020B0503020000020004" pitchFamily="34" charset="-127"/>
+                        <a:ea typeface="Malgun Gothic" panose="020B0503020000020004" pitchFamily="34" charset="-127"/>
+                        <a:cs typeface="Malgun Gothic" panose="020B0503020000020004" pitchFamily="34" charset="-127"/>
                       </a:endParaRPr>
                     </a:p>
                   </a:txBody>
@@ -6083,16 +6083,16 @@
                           <a:solidFill>
                             <a:srgbClr val="1F2937"/>
                           </a:solidFill>
-                          <a:latin typeface="Malgun Gothic" pitchFamily="34" charset="0"/>
-                          <a:ea typeface="Malgun Gothic" pitchFamily="34" charset="-122"/>
-                          <a:cs typeface="Malgun Gothic" pitchFamily="34" charset="-120"/>
+                          <a:latin typeface="Malgun Gothic" panose="020B0503020000020004" pitchFamily="34" charset="-127"/>
+                          <a:ea typeface="Malgun Gothic" panose="020B0503020000020004" pitchFamily="34" charset="-127"/>
+                          <a:cs typeface="Malgun Gothic" panose="020B0503020000020004" pitchFamily="34" charset="-127"/>
                         </a:rPr>
                         <a:t>Active_Assignment_sc 주석은 01→02→Close 체인을 설명하나 실제로는 02_ba만 실행 (chainNext 미사용)</a:t>
                       </a:r>
                       <a:endParaRPr lang="en-US" sz="950" dirty="0">
-                        <a:latin typeface="Malgun Gothic" charset="0"/>
-                        <a:ea typeface="Malgun Gothic" charset="0"/>
-                        <a:cs typeface="Malgun Gothic" charset="0"/>
+                        <a:latin typeface="Malgun Gothic" panose="020B0503020000020004" pitchFamily="34" charset="-127"/>
+                        <a:ea typeface="Malgun Gothic" panose="020B0503020000020004" pitchFamily="34" charset="-127"/>
+                        <a:cs typeface="Malgun Gothic" panose="020B0503020000020004" pitchFamily="34" charset="-127"/>
                       </a:endParaRPr>
                     </a:p>
                   </a:txBody>
@@ -6151,16 +6151,16 @@
                           <a:solidFill>
                             <a:srgbClr val="1F2937"/>
                           </a:solidFill>
-                          <a:latin typeface="Malgun Gothic" pitchFamily="34" charset="0"/>
-                          <a:ea typeface="Malgun Gothic" pitchFamily="34" charset="-122"/>
-                          <a:cs typeface="Malgun Gothic" pitchFamily="34" charset="-120"/>
+                          <a:latin typeface="Malgun Gothic" panose="020B0503020000020004" pitchFamily="34" charset="-127"/>
+                          <a:ea typeface="Malgun Gothic" panose="020B0503020000020004" pitchFamily="34" charset="-127"/>
+                          <a:cs typeface="Malgun Gothic" panose="020B0503020000020004" pitchFamily="34" charset="-127"/>
                         </a:rPr>
                         <a:t>주석 정정, CloseOppty_sc 등록 여부 점검</a:t>
                       </a:r>
                       <a:endParaRPr lang="en-US" sz="950" dirty="0">
-                        <a:latin typeface="Malgun Gothic" charset="0"/>
-                        <a:ea typeface="Malgun Gothic" charset="0"/>
-                        <a:cs typeface="Malgun Gothic" charset="0"/>
+                        <a:latin typeface="Malgun Gothic" panose="020B0503020000020004" pitchFamily="34" charset="-127"/>
+                        <a:ea typeface="Malgun Gothic" panose="020B0503020000020004" pitchFamily="34" charset="-127"/>
+                        <a:cs typeface="Malgun Gothic" panose="020B0503020000020004" pitchFamily="34" charset="-127"/>
                       </a:endParaRPr>
                     </a:p>
                   </a:txBody>
@@ -6221,16 +6221,16 @@
                           <a:solidFill>
                             <a:srgbClr val="1F2937"/>
                           </a:solidFill>
-                          <a:latin typeface="Malgun Gothic" pitchFamily="34" charset="0"/>
-                          <a:ea typeface="Malgun Gothic" pitchFamily="34" charset="-122"/>
-                          <a:cs typeface="Malgun Gothic" pitchFamily="34" charset="-120"/>
+                          <a:latin typeface="Malgun Gothic" panose="020B0503020000020004" pitchFamily="34" charset="-127"/>
+                          <a:ea typeface="Malgun Gothic" panose="020B0503020000020004" pitchFamily="34" charset="-127"/>
+                          <a:cs typeface="Malgun Gothic" panose="020B0503020000020004" pitchFamily="34" charset="-127"/>
                         </a:rPr>
                         <a:t>낮음</a:t>
                       </a:r>
                       <a:endParaRPr lang="en-US" sz="950" dirty="0">
-                        <a:latin typeface="Malgun Gothic" charset="0"/>
-                        <a:ea typeface="Malgun Gothic" charset="0"/>
-                        <a:cs typeface="Malgun Gothic" charset="0"/>
+                        <a:latin typeface="Malgun Gothic" panose="020B0503020000020004" pitchFamily="34" charset="-127"/>
+                        <a:ea typeface="Malgun Gothic" panose="020B0503020000020004" pitchFamily="34" charset="-127"/>
+                        <a:cs typeface="Malgun Gothic" panose="020B0503020000020004" pitchFamily="34" charset="-127"/>
                       </a:endParaRPr>
                     </a:p>
                   </a:txBody>
@@ -6289,16 +6289,16 @@
                           <a:solidFill>
                             <a:srgbClr val="1F2937"/>
                           </a:solidFill>
-                          <a:latin typeface="Malgun Gothic" pitchFamily="34" charset="0"/>
-                          <a:ea typeface="Malgun Gothic" pitchFamily="34" charset="-122"/>
-                          <a:cs typeface="Malgun Gothic" pitchFamily="34" charset="-120"/>
+                          <a:latin typeface="Malgun Gothic" panose="020B0503020000020004" pitchFamily="34" charset="-127"/>
+                          <a:ea typeface="Malgun Gothic" panose="020B0503020000020004" pitchFamily="34" charset="-127"/>
+                          <a:cs typeface="Malgun Gothic" panose="020B0503020000020004" pitchFamily="34" charset="-127"/>
                         </a:rPr>
                         <a:t>Account_tr: 대상이 없어도 매 업데이트마다 SOQL 실행, 기회 update 실패 시 Account 저장까지 롤백</a:t>
                       </a:r>
                       <a:endParaRPr lang="en-US" sz="950" dirty="0">
-                        <a:latin typeface="Malgun Gothic" charset="0"/>
-                        <a:ea typeface="Malgun Gothic" charset="0"/>
-                        <a:cs typeface="Malgun Gothic" charset="0"/>
+                        <a:latin typeface="Malgun Gothic" panose="020B0503020000020004" pitchFamily="34" charset="-127"/>
+                        <a:ea typeface="Malgun Gothic" panose="020B0503020000020004" pitchFamily="34" charset="-127"/>
+                        <a:cs typeface="Malgun Gothic" panose="020B0503020000020004" pitchFamily="34" charset="-127"/>
                       </a:endParaRPr>
                     </a:p>
                   </a:txBody>
@@ -6357,16 +6357,16 @@
                           <a:solidFill>
                             <a:srgbClr val="1F2937"/>
                           </a:solidFill>
-                          <a:latin typeface="Malgun Gothic" pitchFamily="34" charset="0"/>
-                          <a:ea typeface="Malgun Gothic" pitchFamily="34" charset="-122"/>
-                          <a:cs typeface="Malgun Gothic" pitchFamily="34" charset="-120"/>
+                          <a:latin typeface="Malgun Gothic" panose="020B0503020000020004" pitchFamily="34" charset="-127"/>
+                          <a:ea typeface="Malgun Gothic" panose="020B0503020000020004" pitchFamily="34" charset="-127"/>
+                          <a:cs typeface="Malgun Gothic" panose="020B0503020000020004" pitchFamily="34" charset="-127"/>
                         </a:rPr>
                         <a:t>대상 없으면 return, Database.update(…, false)</a:t>
                       </a:r>
                       <a:endParaRPr lang="en-US" sz="950" dirty="0">
-                        <a:latin typeface="Malgun Gothic" charset="0"/>
-                        <a:ea typeface="Malgun Gothic" charset="0"/>
-                        <a:cs typeface="Malgun Gothic" charset="0"/>
+                        <a:latin typeface="Malgun Gothic" panose="020B0503020000020004" pitchFamily="34" charset="-127"/>
+                        <a:ea typeface="Malgun Gothic" panose="020B0503020000020004" pitchFamily="34" charset="-127"/>
+                        <a:cs typeface="Malgun Gothic" panose="020B0503020000020004" pitchFamily="34" charset="-127"/>
                       </a:endParaRPr>
                     </a:p>
                   </a:txBody>
@@ -6427,16 +6427,16 @@
                           <a:solidFill>
                             <a:srgbClr val="1F2937"/>
                           </a:solidFill>
-                          <a:latin typeface="Malgun Gothic" pitchFamily="34" charset="0"/>
-                          <a:ea typeface="Malgun Gothic" pitchFamily="34" charset="-122"/>
-                          <a:cs typeface="Malgun Gothic" pitchFamily="34" charset="-120"/>
+                          <a:latin typeface="Malgun Gothic" panose="020B0503020000020004" pitchFamily="34" charset="-127"/>
+                          <a:ea typeface="Malgun Gothic" panose="020B0503020000020004" pitchFamily="34" charset="-127"/>
+                          <a:cs typeface="Malgun Gothic" panose="020B0503020000020004" pitchFamily="34" charset="-127"/>
                         </a:rPr>
                         <a:t>낮음</a:t>
                       </a:r>
                       <a:endParaRPr lang="en-US" sz="950" dirty="0">
-                        <a:latin typeface="Malgun Gothic" charset="0"/>
-                        <a:ea typeface="Malgun Gothic" charset="0"/>
-                        <a:cs typeface="Malgun Gothic" charset="0"/>
+                        <a:latin typeface="Malgun Gothic" panose="020B0503020000020004" pitchFamily="34" charset="-127"/>
+                        <a:ea typeface="Malgun Gothic" panose="020B0503020000020004" pitchFamily="34" charset="-127"/>
+                        <a:cs typeface="Malgun Gothic" panose="020B0503020000020004" pitchFamily="34" charset="-127"/>
                       </a:endParaRPr>
                     </a:p>
                   </a:txBody>
@@ -6495,16 +6495,16 @@
                           <a:solidFill>
                             <a:srgbClr val="1F2937"/>
                           </a:solidFill>
-                          <a:latin typeface="Malgun Gothic" pitchFamily="34" charset="0"/>
-                          <a:ea typeface="Malgun Gothic" pitchFamily="34" charset="-122"/>
-                          <a:cs typeface="Malgun Gothic" pitchFamily="34" charset="-120"/>
+                          <a:latin typeface="Malgun Gothic" panose="020B0503020000020004" pitchFamily="34" charset="-127"/>
+                          <a:ea typeface="Malgun Gothic" panose="020B0503020000020004" pitchFamily="34" charset="-127"/>
+                          <a:cs typeface="Malgun Gothic" panose="020B0503020000020004" pitchFamily="34" charset="-127"/>
                         </a:rPr>
                         <a:t>Stage 값 TODO 주석 잔존, 수신자 이메일 하드코딩, Assign1 전용 메서드 미사용</a:t>
                       </a:r>
                       <a:endParaRPr lang="en-US" sz="950" dirty="0">
-                        <a:latin typeface="Malgun Gothic" charset="0"/>
-                        <a:ea typeface="Malgun Gothic" charset="0"/>
-                        <a:cs typeface="Malgun Gothic" charset="0"/>
+                        <a:latin typeface="Malgun Gothic" panose="020B0503020000020004" pitchFamily="34" charset="-127"/>
+                        <a:ea typeface="Malgun Gothic" panose="020B0503020000020004" pitchFamily="34" charset="-127"/>
+                        <a:cs typeface="Malgun Gothic" panose="020B0503020000020004" pitchFamily="34" charset="-127"/>
                       </a:endParaRPr>
                     </a:p>
                   </a:txBody>
@@ -6563,16 +6563,16 @@
                           <a:solidFill>
                             <a:srgbClr val="1F2937"/>
                           </a:solidFill>
-                          <a:latin typeface="Malgun Gothic" pitchFamily="34" charset="0"/>
-                          <a:ea typeface="Malgun Gothic" pitchFamily="34" charset="-122"/>
-                          <a:cs typeface="Malgun Gothic" pitchFamily="34" charset="-120"/>
+                          <a:latin typeface="Malgun Gothic" panose="020B0503020000020004" pitchFamily="34" charset="-127"/>
+                          <a:ea typeface="Malgun Gothic" panose="020B0503020000020004" pitchFamily="34" charset="-127"/>
+                          <a:cs typeface="Malgun Gothic" panose="020B0503020000020004" pitchFamily="34" charset="-127"/>
                         </a:rPr>
                         <a:t>주석 정리, 수신자 Custom Label 이관</a:t>
                       </a:r>
                       <a:endParaRPr lang="en-US" sz="950" dirty="0">
-                        <a:latin typeface="Malgun Gothic" charset="0"/>
-                        <a:ea typeface="Malgun Gothic" charset="0"/>
-                        <a:cs typeface="Malgun Gothic" charset="0"/>
+                        <a:latin typeface="Malgun Gothic" panose="020B0503020000020004" pitchFamily="34" charset="-127"/>
+                        <a:ea typeface="Malgun Gothic" panose="020B0503020000020004" pitchFamily="34" charset="-127"/>
+                        <a:cs typeface="Malgun Gothic" panose="020B0503020000020004" pitchFamily="34" charset="-127"/>
                       </a:endParaRPr>
                     </a:p>
                   </a:txBody>
@@ -8970,16 +8970,16 @@
                           <a:solidFill>
                             <a:srgbClr val="FFFFFF"/>
                           </a:solidFill>
-                          <a:latin typeface="Malgun Gothic" pitchFamily="34" charset="0"/>
-                          <a:ea typeface="Malgun Gothic" pitchFamily="34" charset="-122"/>
-                          <a:cs typeface="Malgun Gothic" pitchFamily="34" charset="-120"/>
+                          <a:latin typeface="Malgun Gothic" panose="020B0503020000020004" pitchFamily="34" charset="-127"/>
+                          <a:ea typeface="Malgun Gothic" panose="020B0503020000020004" pitchFamily="34" charset="-127"/>
+                          <a:cs typeface="Malgun Gothic" panose="020B0503020000020004" pitchFamily="34" charset="-127"/>
                         </a:rPr>
                         <a:t>구분</a:t>
                       </a:r>
                       <a:endParaRPr lang="en-US" sz="1100" dirty="0">
-                        <a:latin typeface="Malgun Gothic" charset="0"/>
-                        <a:ea typeface="Malgun Gothic" charset="0"/>
-                        <a:cs typeface="Malgun Gothic" charset="0"/>
+                        <a:latin typeface="Malgun Gothic" panose="020B0503020000020004" pitchFamily="34" charset="-127"/>
+                        <a:ea typeface="Malgun Gothic" panose="020B0503020000020004" pitchFamily="34" charset="-127"/>
+                        <a:cs typeface="Malgun Gothic" panose="020B0503020000020004" pitchFamily="34" charset="-127"/>
                       </a:endParaRPr>
                     </a:p>
                   </a:txBody>
@@ -9038,16 +9038,16 @@
                           <a:solidFill>
                             <a:srgbClr val="FFFFFF"/>
                           </a:solidFill>
-                          <a:latin typeface="Malgun Gothic" pitchFamily="34" charset="0"/>
-                          <a:ea typeface="Malgun Gothic" pitchFamily="34" charset="-122"/>
-                          <a:cs typeface="Malgun Gothic" pitchFamily="34" charset="-120"/>
+                          <a:latin typeface="Malgun Gothic" panose="020B0503020000020004" pitchFamily="34" charset="-127"/>
+                          <a:ea typeface="Malgun Gothic" panose="020B0503020000020004" pitchFamily="34" charset="-127"/>
+                          <a:cs typeface="Malgun Gothic" panose="020B0503020000020004" pitchFamily="34" charset="-127"/>
                         </a:rPr>
                         <a:t>조건</a:t>
                       </a:r>
                       <a:endParaRPr lang="en-US" sz="1100" dirty="0">
-                        <a:latin typeface="Malgun Gothic" charset="0"/>
-                        <a:ea typeface="Malgun Gothic" charset="0"/>
-                        <a:cs typeface="Malgun Gothic" charset="0"/>
+                        <a:latin typeface="Malgun Gothic" panose="020B0503020000020004" pitchFamily="34" charset="-127"/>
+                        <a:ea typeface="Malgun Gothic" panose="020B0503020000020004" pitchFamily="34" charset="-127"/>
+                        <a:cs typeface="Malgun Gothic" panose="020B0503020000020004" pitchFamily="34" charset="-127"/>
                       </a:endParaRPr>
                     </a:p>
                   </a:txBody>
@@ -9106,16 +9106,16 @@
                           <a:solidFill>
                             <a:srgbClr val="FFFFFF"/>
                           </a:solidFill>
-                          <a:latin typeface="Malgun Gothic" pitchFamily="34" charset="0"/>
-                          <a:ea typeface="Malgun Gothic" pitchFamily="34" charset="-122"/>
-                          <a:cs typeface="Malgun Gothic" pitchFamily="34" charset="-120"/>
+                          <a:latin typeface="Malgun Gothic" panose="020B0503020000020004" pitchFamily="34" charset="-127"/>
+                          <a:ea typeface="Malgun Gothic" panose="020B0503020000020004" pitchFamily="34" charset="-127"/>
+                          <a:cs typeface="Malgun Gothic" panose="020B0503020000020004" pitchFamily="34" charset="-127"/>
                         </a:rPr>
                         <a:t>비고</a:t>
                       </a:r>
                       <a:endParaRPr lang="en-US" sz="1100" dirty="0">
-                        <a:latin typeface="Malgun Gothic" charset="0"/>
-                        <a:ea typeface="Malgun Gothic" charset="0"/>
-                        <a:cs typeface="Malgun Gothic" charset="0"/>
+                        <a:latin typeface="Malgun Gothic" panose="020B0503020000020004" pitchFamily="34" charset="-127"/>
+                        <a:ea typeface="Malgun Gothic" panose="020B0503020000020004" pitchFamily="34" charset="-127"/>
+                        <a:cs typeface="Malgun Gothic" panose="020B0503020000020004" pitchFamily="34" charset="-127"/>
                       </a:endParaRPr>
                     </a:p>
                   </a:txBody>
@@ -9176,16 +9176,16 @@
                           <a:solidFill>
                             <a:srgbClr val="1F2937"/>
                           </a:solidFill>
-                          <a:latin typeface="Malgun Gothic" pitchFamily="34" charset="0"/>
-                          <a:ea typeface="Malgun Gothic" pitchFamily="34" charset="-122"/>
-                          <a:cs typeface="Malgun Gothic" pitchFamily="34" charset="-120"/>
+                          <a:latin typeface="Malgun Gothic" panose="020B0503020000020004" pitchFamily="34" charset="-127"/>
+                          <a:ea typeface="Malgun Gothic" panose="020B0503020000020004" pitchFamily="34" charset="-127"/>
+                          <a:cs typeface="Malgun Gothic" panose="020B0503020000020004" pitchFamily="34" charset="-127"/>
                         </a:rPr>
                         <a:t>셀러 유형</a:t>
                       </a:r>
                       <a:endParaRPr lang="en-US" sz="1050" dirty="0">
-                        <a:latin typeface="Malgun Gothic" charset="0"/>
-                        <a:ea typeface="Malgun Gothic" charset="0"/>
-                        <a:cs typeface="Malgun Gothic" charset="0"/>
+                        <a:latin typeface="Malgun Gothic" panose="020B0503020000020004" pitchFamily="34" charset="-127"/>
+                        <a:ea typeface="Malgun Gothic" panose="020B0503020000020004" pitchFamily="34" charset="-127"/>
+                        <a:cs typeface="Malgun Gothic" panose="020B0503020000020004" pitchFamily="34" charset="-127"/>
                       </a:endParaRPr>
                     </a:p>
                   </a:txBody>
@@ -9244,16 +9244,16 @@
                           <a:solidFill>
                             <a:srgbClr val="1F2937"/>
                           </a:solidFill>
-                          <a:latin typeface="Malgun Gothic" pitchFamily="34" charset="0"/>
-                          <a:ea typeface="Malgun Gothic" pitchFamily="34" charset="-122"/>
-                          <a:cs typeface="Malgun Gothic" pitchFamily="34" charset="-120"/>
+                          <a:latin typeface="Malgun Gothic" panose="020B0503020000020004" pitchFamily="34" charset="-127"/>
+                          <a:ea typeface="Malgun Gothic" panose="020B0503020000020004" pitchFamily="34" charset="-127"/>
+                          <a:cs typeface="Malgun Gothic" panose="020B0503020000020004" pitchFamily="34" charset="-127"/>
                         </a:rPr>
                         <a:t>Seller_Type__c 에 '3P' 포함</a:t>
                       </a:r>
                       <a:endParaRPr lang="en-US" sz="1050" dirty="0">
-                        <a:latin typeface="Malgun Gothic" charset="0"/>
-                        <a:ea typeface="Malgun Gothic" charset="0"/>
-                        <a:cs typeface="Malgun Gothic" charset="0"/>
+                        <a:latin typeface="Malgun Gothic" panose="020B0503020000020004" pitchFamily="34" charset="-127"/>
+                        <a:ea typeface="Malgun Gothic" panose="020B0503020000020004" pitchFamily="34" charset="-127"/>
+                        <a:cs typeface="Malgun Gothic" panose="020B0503020000020004" pitchFamily="34" charset="-127"/>
                       </a:endParaRPr>
                     </a:p>
                   </a:txBody>
@@ -9308,9 +9308,9 @@
                         <a:buNone/>
                       </a:pPr>
                       <a:endParaRPr lang="en-US" sz="1050" dirty="0">
-                        <a:latin typeface="Malgun Gothic" charset="0"/>
-                        <a:ea typeface="Malgun Gothic" charset="0"/>
-                        <a:cs typeface="Malgun Gothic" charset="0"/>
+                        <a:latin typeface="Malgun Gothic" panose="020B0503020000020004" pitchFamily="34" charset="-127"/>
+                        <a:ea typeface="Malgun Gothic" panose="020B0503020000020004" pitchFamily="34" charset="-127"/>
+                        <a:cs typeface="Malgun Gothic" panose="020B0503020000020004" pitchFamily="34" charset="-127"/>
                       </a:endParaRPr>
                     </a:p>
                   </a:txBody>
@@ -9371,16 +9371,16 @@
                           <a:solidFill>
                             <a:srgbClr val="1F2937"/>
                           </a:solidFill>
-                          <a:latin typeface="Malgun Gothic" pitchFamily="34" charset="0"/>
-                          <a:ea typeface="Malgun Gothic" pitchFamily="34" charset="-122"/>
-                          <a:cs typeface="Malgun Gothic" pitchFamily="34" charset="-120"/>
+                          <a:latin typeface="Malgun Gothic" panose="020B0503020000020004" pitchFamily="34" charset="-127"/>
+                          <a:ea typeface="Malgun Gothic" panose="020B0503020000020004" pitchFamily="34" charset="-127"/>
+                          <a:cs typeface="Malgun Gothic" panose="020B0503020000020004" pitchFamily="34" charset="-127"/>
                         </a:rPr>
                         <a:t>국가</a:t>
                       </a:r>
                       <a:endParaRPr lang="en-US" sz="1050" dirty="0">
-                        <a:latin typeface="Malgun Gothic" charset="0"/>
-                        <a:ea typeface="Malgun Gothic" charset="0"/>
-                        <a:cs typeface="Malgun Gothic" charset="0"/>
+                        <a:latin typeface="Malgun Gothic" panose="020B0503020000020004" pitchFamily="34" charset="-127"/>
+                        <a:ea typeface="Malgun Gothic" panose="020B0503020000020004" pitchFamily="34" charset="-127"/>
+                        <a:cs typeface="Malgun Gothic" panose="020B0503020000020004" pitchFamily="34" charset="-127"/>
                       </a:endParaRPr>
                     </a:p>
                   </a:txBody>
@@ -9439,16 +9439,16 @@
                           <a:solidFill>
                             <a:srgbClr val="1F2937"/>
                           </a:solidFill>
-                          <a:latin typeface="Malgun Gothic" pitchFamily="34" charset="0"/>
-                          <a:ea typeface="Malgun Gothic" pitchFamily="34" charset="-122"/>
-                          <a:cs typeface="Malgun Gothic" pitchFamily="34" charset="-120"/>
+                          <a:latin typeface="Malgun Gothic" panose="020B0503020000020004" pitchFamily="34" charset="-127"/>
+                          <a:ea typeface="Malgun Gothic" panose="020B0503020000020004" pitchFamily="34" charset="-127"/>
+                          <a:cs typeface="Malgun Gothic" panose="020B0503020000020004" pitchFamily="34" charset="-127"/>
                         </a:rPr>
                         <a:t>Seller_Country__c ≠ China / Hong Kong / Macau</a:t>
                       </a:r>
                       <a:endParaRPr lang="en-US" sz="1050" dirty="0">
-                        <a:latin typeface="Malgun Gothic" charset="0"/>
-                        <a:ea typeface="Malgun Gothic" charset="0"/>
-                        <a:cs typeface="Malgun Gothic" charset="0"/>
+                        <a:latin typeface="Malgun Gothic" panose="020B0503020000020004" pitchFamily="34" charset="-127"/>
+                        <a:ea typeface="Malgun Gothic" panose="020B0503020000020004" pitchFamily="34" charset="-127"/>
+                        <a:cs typeface="Malgun Gothic" panose="020B0503020000020004" pitchFamily="34" charset="-127"/>
                       </a:endParaRPr>
                     </a:p>
                   </a:txBody>
@@ -9503,9 +9503,9 @@
                         <a:buNone/>
                       </a:pPr>
                       <a:endParaRPr lang="en-US" sz="1050" dirty="0">
-                        <a:latin typeface="Malgun Gothic" charset="0"/>
-                        <a:ea typeface="Malgun Gothic" charset="0"/>
-                        <a:cs typeface="Malgun Gothic" charset="0"/>
+                        <a:latin typeface="Malgun Gothic" panose="020B0503020000020004" pitchFamily="34" charset="-127"/>
+                        <a:ea typeface="Malgun Gothic" panose="020B0503020000020004" pitchFamily="34" charset="-127"/>
+                        <a:cs typeface="Malgun Gothic" panose="020B0503020000020004" pitchFamily="34" charset="-127"/>
                       </a:endParaRPr>
                     </a:p>
                   </a:txBody>
@@ -9566,16 +9566,16 @@
                           <a:solidFill>
                             <a:srgbClr val="1F2937"/>
                           </a:solidFill>
-                          <a:latin typeface="Malgun Gothic" pitchFamily="34" charset="0"/>
-                          <a:ea typeface="Malgun Gothic" pitchFamily="34" charset="-122"/>
-                          <a:cs typeface="Malgun Gothic" pitchFamily="34" charset="-120"/>
+                          <a:latin typeface="Malgun Gothic" panose="020B0503020000020004" pitchFamily="34" charset="-127"/>
+                          <a:ea typeface="Malgun Gothic" panose="020B0503020000020004" pitchFamily="34" charset="-127"/>
+                          <a:cs typeface="Malgun Gothic" panose="020B0503020000020004" pitchFamily="34" charset="-127"/>
                         </a:rPr>
                         <a:t>상태</a:t>
                       </a:r>
                       <a:endParaRPr lang="en-US" sz="1050" dirty="0">
-                        <a:latin typeface="Malgun Gothic" charset="0"/>
-                        <a:ea typeface="Malgun Gothic" charset="0"/>
-                        <a:cs typeface="Malgun Gothic" charset="0"/>
+                        <a:latin typeface="Malgun Gothic" panose="020B0503020000020004" pitchFamily="34" charset="-127"/>
+                        <a:ea typeface="Malgun Gothic" panose="020B0503020000020004" pitchFamily="34" charset="-127"/>
+                        <a:cs typeface="Malgun Gothic" panose="020B0503020000020004" pitchFamily="34" charset="-127"/>
                       </a:endParaRPr>
                     </a:p>
                   </a:txBody>
@@ -9634,16 +9634,16 @@
                           <a:solidFill>
                             <a:srgbClr val="1F2937"/>
                           </a:solidFill>
-                          <a:latin typeface="Malgun Gothic" pitchFamily="34" charset="0"/>
-                          <a:ea typeface="Malgun Gothic" pitchFamily="34" charset="-122"/>
-                          <a:cs typeface="Malgun Gothic" pitchFamily="34" charset="-120"/>
+                          <a:latin typeface="Malgun Gothic" panose="020B0503020000020004" pitchFamily="34" charset="-127"/>
+                          <a:ea typeface="Malgun Gothic" panose="020B0503020000020004" pitchFamily="34" charset="-127"/>
+                          <a:cs typeface="Malgun Gothic" panose="020B0503020000020004" pitchFamily="34" charset="-127"/>
                         </a:rPr>
                         <a:t>Lead_Status__c ≠ '3P No assign',  Closed_Business__c = FALSE</a:t>
                       </a:r>
                       <a:endParaRPr lang="en-US" sz="1050" dirty="0">
-                        <a:latin typeface="Malgun Gothic" charset="0"/>
-                        <a:ea typeface="Malgun Gothic" charset="0"/>
-                        <a:cs typeface="Malgun Gothic" charset="0"/>
+                        <a:latin typeface="Malgun Gothic" panose="020B0503020000020004" pitchFamily="34" charset="-127"/>
+                        <a:ea typeface="Malgun Gothic" panose="020B0503020000020004" pitchFamily="34" charset="-127"/>
+                        <a:cs typeface="Malgun Gothic" panose="020B0503020000020004" pitchFamily="34" charset="-127"/>
                       </a:endParaRPr>
                     </a:p>
                   </a:txBody>
@@ -9698,9 +9698,9 @@
                         <a:buNone/>
                       </a:pPr>
                       <a:endParaRPr lang="en-US" sz="1050" dirty="0">
-                        <a:latin typeface="Malgun Gothic" charset="0"/>
-                        <a:ea typeface="Malgun Gothic" charset="0"/>
-                        <a:cs typeface="Malgun Gothic" charset="0"/>
+                        <a:latin typeface="Malgun Gothic" panose="020B0503020000020004" pitchFamily="34" charset="-127"/>
+                        <a:ea typeface="Malgun Gothic" panose="020B0503020000020004" pitchFamily="34" charset="-127"/>
+                        <a:cs typeface="Malgun Gothic" panose="020B0503020000020004" pitchFamily="34" charset="-127"/>
                       </a:endParaRPr>
                     </a:p>
                   </a:txBody>
@@ -9761,16 +9761,16 @@
                           <a:solidFill>
                             <a:srgbClr val="1F2937"/>
                           </a:solidFill>
-                          <a:latin typeface="Malgun Gothic" pitchFamily="34" charset="0"/>
-                          <a:ea typeface="Malgun Gothic" pitchFamily="34" charset="-122"/>
-                          <a:cs typeface="Malgun Gothic" pitchFamily="34" charset="-120"/>
+                          <a:latin typeface="Malgun Gothic" panose="020B0503020000020004" pitchFamily="34" charset="-127"/>
+                          <a:ea typeface="Malgun Gothic" panose="020B0503020000020004" pitchFamily="34" charset="-127"/>
+                          <a:cs typeface="Malgun Gothic" panose="020B0503020000020004" pitchFamily="34" charset="-127"/>
                         </a:rPr>
                         <a:t>상품 등록일</a:t>
                       </a:r>
                       <a:endParaRPr lang="en-US" sz="1050" dirty="0">
-                        <a:latin typeface="Malgun Gothic" charset="0"/>
-                        <a:ea typeface="Malgun Gothic" charset="0"/>
-                        <a:cs typeface="Malgun Gothic" charset="0"/>
+                        <a:latin typeface="Malgun Gothic" panose="020B0503020000020004" pitchFamily="34" charset="-127"/>
+                        <a:ea typeface="Malgun Gothic" panose="020B0503020000020004" pitchFamily="34" charset="-127"/>
+                        <a:cs typeface="Malgun Gothic" panose="020B0503020000020004" pitchFamily="34" charset="-127"/>
                       </a:endParaRPr>
                     </a:p>
                   </a:txBody>
@@ -9829,16 +9829,16 @@
                           <a:solidFill>
                             <a:srgbClr val="1F2937"/>
                           </a:solidFill>
-                          <a:latin typeface="Malgun Gothic" pitchFamily="34" charset="0"/>
-                          <a:ea typeface="Malgun Gothic" pitchFamily="34" charset="-122"/>
-                          <a:cs typeface="Malgun Gothic" pitchFamily="34" charset="-120"/>
+                          <a:latin typeface="Malgun Gothic" panose="020B0503020000020004" pitchFamily="34" charset="-127"/>
+                          <a:ea typeface="Malgun Gothic" panose="020B0503020000020004" pitchFamily="34" charset="-127"/>
+                          <a:cs typeface="Malgun Gothic" panose="020B0503020000020004" pitchFamily="34" charset="-127"/>
                         </a:rPr>
                         <a:t>vendor_first_product_registion_date__c = 오늘 − D일</a:t>
                       </a:r>
                       <a:endParaRPr lang="en-US" sz="1050" dirty="0">
-                        <a:latin typeface="Malgun Gothic" charset="0"/>
-                        <a:ea typeface="Malgun Gothic" charset="0"/>
-                        <a:cs typeface="Malgun Gothic" charset="0"/>
+                        <a:latin typeface="Malgun Gothic" panose="020B0503020000020004" pitchFamily="34" charset="-127"/>
+                        <a:ea typeface="Malgun Gothic" panose="020B0503020000020004" pitchFamily="34" charset="-127"/>
+                        <a:cs typeface="Malgun Gothic" panose="020B0503020000020004" pitchFamily="34" charset="-127"/>
                       </a:endParaRPr>
                     </a:p>
                   </a:txBody>
@@ -9897,16 +9897,16 @@
                           <a:solidFill>
                             <a:srgbClr val="1F2937"/>
                           </a:solidFill>
-                          <a:latin typeface="Malgun Gothic" pitchFamily="34" charset="0"/>
-                          <a:ea typeface="Malgun Gothic" pitchFamily="34" charset="-122"/>
-                          <a:cs typeface="Malgun Gothic" pitchFamily="34" charset="-120"/>
+                          <a:latin typeface="Malgun Gothic" panose="020B0503020000020004" pitchFamily="34" charset="-127"/>
+                          <a:ea typeface="Malgun Gothic" panose="020B0503020000020004" pitchFamily="34" charset="-127"/>
+                          <a:cs typeface="Malgun Gothic" panose="020B0503020000020004" pitchFamily="34" charset="-127"/>
                         </a:rPr>
                         <a:t>D = Custom Label MM_AssignmentFirstRegistion (현재 10)</a:t>
                       </a:r>
                       <a:endParaRPr lang="en-US" sz="1050" dirty="0">
-                        <a:latin typeface="Malgun Gothic" charset="0"/>
-                        <a:ea typeface="Malgun Gothic" charset="0"/>
-                        <a:cs typeface="Malgun Gothic" charset="0"/>
+                        <a:latin typeface="Malgun Gothic" panose="020B0503020000020004" pitchFamily="34" charset="-127"/>
+                        <a:ea typeface="Malgun Gothic" panose="020B0503020000020004" pitchFamily="34" charset="-127"/>
+                        <a:cs typeface="Malgun Gothic" panose="020B0503020000020004" pitchFamily="34" charset="-127"/>
                       </a:endParaRPr>
                     </a:p>
                   </a:txBody>
@@ -9967,16 +9967,16 @@
                           <a:solidFill>
                             <a:srgbClr val="1F2937"/>
                           </a:solidFill>
-                          <a:latin typeface="Malgun Gothic" pitchFamily="34" charset="0"/>
-                          <a:ea typeface="Malgun Gothic" pitchFamily="34" charset="-122"/>
-                          <a:cs typeface="Malgun Gothic" pitchFamily="34" charset="-120"/>
+                          <a:latin typeface="Malgun Gothic" panose="020B0503020000020004" pitchFamily="34" charset="-127"/>
+                          <a:ea typeface="Malgun Gothic" panose="020B0503020000020004" pitchFamily="34" charset="-127"/>
+                          <a:cs typeface="Malgun Gothic" panose="020B0503020000020004" pitchFamily="34" charset="-127"/>
                         </a:rPr>
                         <a:t>미판매</a:t>
                       </a:r>
                       <a:endParaRPr lang="en-US" sz="1050" dirty="0">
-                        <a:latin typeface="Malgun Gothic" charset="0"/>
-                        <a:ea typeface="Malgun Gothic" charset="0"/>
-                        <a:cs typeface="Malgun Gothic" charset="0"/>
+                        <a:latin typeface="Malgun Gothic" panose="020B0503020000020004" pitchFamily="34" charset="-127"/>
+                        <a:ea typeface="Malgun Gothic" panose="020B0503020000020004" pitchFamily="34" charset="-127"/>
+                        <a:cs typeface="Malgun Gothic" panose="020B0503020000020004" pitchFamily="34" charset="-127"/>
                       </a:endParaRPr>
                     </a:p>
                   </a:txBody>
@@ -10035,16 +10035,16 @@
                           <a:solidFill>
                             <a:srgbClr val="1F2937"/>
                           </a:solidFill>
-                          <a:latin typeface="Malgun Gothic" pitchFamily="34" charset="0"/>
-                          <a:ea typeface="Malgun Gothic" pitchFamily="34" charset="-122"/>
-                          <a:cs typeface="Malgun Gothic" pitchFamily="34" charset="-120"/>
+                          <a:latin typeface="Malgun Gothic" panose="020B0503020000020004" pitchFamily="34" charset="-127"/>
+                          <a:ea typeface="Malgun Gothic" panose="020B0503020000020004" pitchFamily="34" charset="-127"/>
+                          <a:cs typeface="Malgun Gothic" panose="020B0503020000020004" pitchFamily="34" charset="-127"/>
                         </a:rPr>
                         <a:t>Vendor_first_order_uploaded_at__c = NULL</a:t>
                       </a:r>
                       <a:endParaRPr lang="en-US" sz="1050" dirty="0">
-                        <a:latin typeface="Malgun Gothic" charset="0"/>
-                        <a:ea typeface="Malgun Gothic" charset="0"/>
-                        <a:cs typeface="Malgun Gothic" charset="0"/>
+                        <a:latin typeface="Malgun Gothic" panose="020B0503020000020004" pitchFamily="34" charset="-127"/>
+                        <a:ea typeface="Malgun Gothic" panose="020B0503020000020004" pitchFamily="34" charset="-127"/>
+                        <a:cs typeface="Malgun Gothic" panose="020B0503020000020004" pitchFamily="34" charset="-127"/>
                       </a:endParaRPr>
                     </a:p>
                   </a:txBody>
@@ -10103,16 +10103,16 @@
                           <a:solidFill>
                             <a:srgbClr val="1F2937"/>
                           </a:solidFill>
-                          <a:latin typeface="Malgun Gothic" pitchFamily="34" charset="0"/>
-                          <a:ea typeface="Malgun Gothic" pitchFamily="34" charset="-122"/>
-                          <a:cs typeface="Malgun Gothic" pitchFamily="34" charset="-120"/>
+                          <a:latin typeface="Malgun Gothic" panose="020B0503020000020004" pitchFamily="34" charset="-127"/>
+                          <a:ea typeface="Malgun Gothic" panose="020B0503020000020004" pitchFamily="34" charset="-127"/>
+                          <a:cs typeface="Malgun Gothic" panose="020B0503020000020004" pitchFamily="34" charset="-127"/>
                         </a:rPr>
                         <a:t>첫 주문 없음</a:t>
                       </a:r>
                       <a:endParaRPr lang="en-US" sz="1050" dirty="0">
-                        <a:latin typeface="Malgun Gothic" charset="0"/>
-                        <a:ea typeface="Malgun Gothic" charset="0"/>
-                        <a:cs typeface="Malgun Gothic" charset="0"/>
+                        <a:latin typeface="Malgun Gothic" panose="020B0503020000020004" pitchFamily="34" charset="-127"/>
+                        <a:ea typeface="Malgun Gothic" panose="020B0503020000020004" pitchFamily="34" charset="-127"/>
+                        <a:cs typeface="Malgun Gothic" panose="020B0503020000020004" pitchFamily="34" charset="-127"/>
                       </a:endParaRPr>
                     </a:p>
                   </a:txBody>
@@ -10173,16 +10173,16 @@
                           <a:solidFill>
                             <a:srgbClr val="1F2937"/>
                           </a:solidFill>
-                          <a:latin typeface="Malgun Gothic" pitchFamily="34" charset="0"/>
-                          <a:ea typeface="Malgun Gothic" pitchFamily="34" charset="-122"/>
-                          <a:cs typeface="Malgun Gothic" pitchFamily="34" charset="-120"/>
+                          <a:latin typeface="Malgun Gothic" panose="020B0503020000020004" pitchFamily="34" charset="-127"/>
+                          <a:ea typeface="Malgun Gothic" panose="020B0503020000020004" pitchFamily="34" charset="-127"/>
+                          <a:cs typeface="Malgun Gothic" panose="020B0503020000020004" pitchFamily="34" charset="-127"/>
                         </a:rPr>
                         <a:t>중복 방지</a:t>
                       </a:r>
                       <a:endParaRPr lang="en-US" sz="1050" dirty="0">
-                        <a:latin typeface="Malgun Gothic" charset="0"/>
-                        <a:ea typeface="Malgun Gothic" charset="0"/>
-                        <a:cs typeface="Malgun Gothic" charset="0"/>
+                        <a:latin typeface="Malgun Gothic" panose="020B0503020000020004" pitchFamily="34" charset="-127"/>
+                        <a:ea typeface="Malgun Gothic" panose="020B0503020000020004" pitchFamily="34" charset="-127"/>
+                        <a:cs typeface="Malgun Gothic" panose="020B0503020000020004" pitchFamily="34" charset="-127"/>
                       </a:endParaRPr>
                     </a:p>
                   </a:txBody>
@@ -10241,16 +10241,16 @@
                           <a:solidFill>
                             <a:srgbClr val="1F2937"/>
                           </a:solidFill>
-                          <a:latin typeface="Malgun Gothic" pitchFamily="34" charset="0"/>
-                          <a:ea typeface="Malgun Gothic" pitchFamily="34" charset="-122"/>
-                          <a:cs typeface="Malgun Gothic" pitchFamily="34" charset="-120"/>
+                          <a:latin typeface="Malgun Gothic" panose="020B0503020000020004" pitchFamily="34" charset="-127"/>
+                          <a:ea typeface="Malgun Gothic" panose="020B0503020000020004" pitchFamily="34" charset="-127"/>
+                          <a:cs typeface="Malgun Gothic" panose="020B0503020000020004" pitchFamily="34" charset="-127"/>
                         </a:rPr>
                         <a:t>MMA-PR 기회 없음,  Oppty_Check__c = 0</a:t>
                       </a:r>
                       <a:endParaRPr lang="en-US" sz="1050" dirty="0">
-                        <a:latin typeface="Malgun Gothic" charset="0"/>
-                        <a:ea typeface="Malgun Gothic" charset="0"/>
-                        <a:cs typeface="Malgun Gothic" charset="0"/>
+                        <a:latin typeface="Malgun Gothic" panose="020B0503020000020004" pitchFamily="34" charset="-127"/>
+                        <a:ea typeface="Malgun Gothic" panose="020B0503020000020004" pitchFamily="34" charset="-127"/>
+                        <a:cs typeface="Malgun Gothic" panose="020B0503020000020004" pitchFamily="34" charset="-127"/>
                       </a:endParaRPr>
                     </a:p>
                   </a:txBody>
@@ -10309,16 +10309,16 @@
                           <a:solidFill>
                             <a:srgbClr val="1F2937"/>
                           </a:solidFill>
-                          <a:latin typeface="Malgun Gothic" pitchFamily="34" charset="0"/>
-                          <a:ea typeface="Malgun Gothic" pitchFamily="34" charset="-122"/>
-                          <a:cs typeface="Malgun Gothic" pitchFamily="34" charset="-120"/>
+                          <a:latin typeface="Malgun Gothic" panose="020B0503020000020004" pitchFamily="34" charset="-127"/>
+                          <a:ea typeface="Malgun Gothic" panose="020B0503020000020004" pitchFamily="34" charset="-127"/>
+                          <a:cs typeface="Malgun Gothic" panose="020B0503020000020004" pitchFamily="34" charset="-127"/>
                         </a:rPr>
                         <a:t>MM Assignment 대상과 겹치지 않도록</a:t>
                       </a:r>
                       <a:endParaRPr lang="en-US" sz="1050" dirty="0">
-                        <a:latin typeface="Malgun Gothic" charset="0"/>
-                        <a:ea typeface="Malgun Gothic" charset="0"/>
-                        <a:cs typeface="Malgun Gothic" charset="0"/>
+                        <a:latin typeface="Malgun Gothic" panose="020B0503020000020004" pitchFamily="34" charset="-127"/>
+                        <a:ea typeface="Malgun Gothic" panose="020B0503020000020004" pitchFamily="34" charset="-127"/>
+                        <a:cs typeface="Malgun Gothic" panose="020B0503020000020004" pitchFamily="34" charset="-127"/>
                       </a:endParaRPr>
                     </a:p>
                   </a:txBody>
@@ -10379,16 +10379,16 @@
                           <a:solidFill>
                             <a:srgbClr val="1F2937"/>
                           </a:solidFill>
-                          <a:latin typeface="Malgun Gothic" pitchFamily="34" charset="0"/>
-                          <a:ea typeface="Malgun Gothic" pitchFamily="34" charset="-122"/>
-                          <a:cs typeface="Malgun Gothic" pitchFamily="34" charset="-120"/>
+                          <a:latin typeface="Malgun Gothic" panose="020B0503020000020004" pitchFamily="34" charset="-127"/>
+                          <a:ea typeface="Malgun Gothic" panose="020B0503020000020004" pitchFamily="34" charset="-127"/>
+                          <a:cs typeface="Malgun Gothic" panose="020B0503020000020004" pitchFamily="34" charset="-127"/>
                         </a:rPr>
                         <a:t>레코드타입</a:t>
                       </a:r>
                       <a:endParaRPr lang="en-US" sz="1050" dirty="0">
-                        <a:latin typeface="Malgun Gothic" charset="0"/>
-                        <a:ea typeface="Malgun Gothic" charset="0"/>
-                        <a:cs typeface="Malgun Gothic" charset="0"/>
+                        <a:latin typeface="Malgun Gothic" panose="020B0503020000020004" pitchFamily="34" charset="-127"/>
+                        <a:ea typeface="Malgun Gothic" panose="020B0503020000020004" pitchFamily="34" charset="-127"/>
+                        <a:cs typeface="Malgun Gothic" panose="020B0503020000020004" pitchFamily="34" charset="-127"/>
                       </a:endParaRPr>
                     </a:p>
                   </a:txBody>
@@ -10447,16 +10447,16 @@
                           <a:solidFill>
                             <a:srgbClr val="1F2937"/>
                           </a:solidFill>
-                          <a:latin typeface="Malgun Gothic" pitchFamily="34" charset="0"/>
-                          <a:ea typeface="Malgun Gothic" pitchFamily="34" charset="-122"/>
-                          <a:cs typeface="Malgun Gothic" pitchFamily="34" charset="-120"/>
+                          <a:latin typeface="Malgun Gothic" panose="020B0503020000020004" pitchFamily="34" charset="-127"/>
+                          <a:ea typeface="Malgun Gothic" panose="020B0503020000020004" pitchFamily="34" charset="-127"/>
+                          <a:cs typeface="Malgun Gothic" panose="020B0503020000020004" pitchFamily="34" charset="-127"/>
                         </a:rPr>
                         <a:t>X3P_Account 또는 Master_record</a:t>
                       </a:r>
                       <a:endParaRPr lang="en-US" sz="1050" dirty="0">
-                        <a:latin typeface="Malgun Gothic" charset="0"/>
-                        <a:ea typeface="Malgun Gothic" charset="0"/>
-                        <a:cs typeface="Malgun Gothic" charset="0"/>
+                        <a:latin typeface="Malgun Gothic" panose="020B0503020000020004" pitchFamily="34" charset="-127"/>
+                        <a:ea typeface="Malgun Gothic" panose="020B0503020000020004" pitchFamily="34" charset="-127"/>
+                        <a:cs typeface="Malgun Gothic" panose="020B0503020000020004" pitchFamily="34" charset="-127"/>
                       </a:endParaRPr>
                     </a:p>
                   </a:txBody>
@@ -10515,16 +10515,16 @@
                           <a:solidFill>
                             <a:srgbClr val="1F2937"/>
                           </a:solidFill>
-                          <a:latin typeface="Malgun Gothic" pitchFamily="34" charset="0"/>
-                          <a:ea typeface="Malgun Gothic" pitchFamily="34" charset="-122"/>
-                          <a:cs typeface="Malgun Gothic" pitchFamily="34" charset="-120"/>
+                          <a:latin typeface="Malgun Gothic" panose="020B0503020000020004" pitchFamily="34" charset="-127"/>
+                          <a:ea typeface="Malgun Gothic" panose="020B0503020000020004" pitchFamily="34" charset="-127"/>
+                          <a:cs typeface="Malgun Gothic" panose="020B0503020000020004" pitchFamily="34" charset="-127"/>
                         </a:rPr>
                         <a:t>RITM1369244 반영</a:t>
                       </a:r>
                       <a:endParaRPr lang="en-US" sz="1050" dirty="0">
-                        <a:latin typeface="Malgun Gothic" charset="0"/>
-                        <a:ea typeface="Malgun Gothic" charset="0"/>
-                        <a:cs typeface="Malgun Gothic" charset="0"/>
+                        <a:latin typeface="Malgun Gothic" panose="020B0503020000020004" pitchFamily="34" charset="-127"/>
+                        <a:ea typeface="Malgun Gothic" panose="020B0503020000020004" pitchFamily="34" charset="-127"/>
+                        <a:cs typeface="Malgun Gothic" panose="020B0503020000020004" pitchFamily="34" charset="-127"/>
                       </a:endParaRPr>
                     </a:p>
                   </a:txBody>
@@ -10585,16 +10585,16 @@
                           <a:solidFill>
                             <a:srgbClr val="1F2937"/>
                           </a:solidFill>
-                          <a:latin typeface="Malgun Gothic" pitchFamily="34" charset="0"/>
-                          <a:ea typeface="Malgun Gothic" pitchFamily="34" charset="-122"/>
-                          <a:cs typeface="Malgun Gothic" pitchFamily="34" charset="-120"/>
+                          <a:latin typeface="Malgun Gothic" panose="020B0503020000020004" pitchFamily="34" charset="-127"/>
+                          <a:ea typeface="Malgun Gothic" panose="020B0503020000020004" pitchFamily="34" charset="-127"/>
+                          <a:cs typeface="Malgun Gothic" panose="020B0503020000020004" pitchFamily="34" charset="-127"/>
                         </a:rPr>
                         <a:t>기타</a:t>
                       </a:r>
                       <a:endParaRPr lang="en-US" sz="1050" dirty="0">
-                        <a:latin typeface="Malgun Gothic" charset="0"/>
-                        <a:ea typeface="Malgun Gothic" charset="0"/>
-                        <a:cs typeface="Malgun Gothic" charset="0"/>
+                        <a:latin typeface="Malgun Gothic" panose="020B0503020000020004" pitchFamily="34" charset="-127"/>
+                        <a:ea typeface="Malgun Gothic" panose="020B0503020000020004" pitchFamily="34" charset="-127"/>
+                        <a:cs typeface="Malgun Gothic" panose="020B0503020000020004" pitchFamily="34" charset="-127"/>
                       </a:endParaRPr>
                     </a:p>
                   </a:txBody>
@@ -10653,16 +10653,16 @@
                           <a:solidFill>
                             <a:srgbClr val="1F2937"/>
                           </a:solidFill>
-                          <a:latin typeface="Malgun Gothic" pitchFamily="34" charset="0"/>
-                          <a:ea typeface="Malgun Gothic" pitchFamily="34" charset="-122"/>
-                          <a:cs typeface="Malgun Gothic" pitchFamily="34" charset="-120"/>
+                          <a:latin typeface="Malgun Gothic" panose="020B0503020000020004" pitchFamily="34" charset="-127"/>
+                          <a:ea typeface="Malgun Gothic" panose="020B0503020000020004" pitchFamily="34" charset="-127"/>
+                          <a:cs typeface="Malgun Gothic" panose="020B0503020000020004" pitchFamily="34" charset="-127"/>
                         </a:rPr>
                         <a:t>Global_Seller__c = FALSE,  Seller_Id__c LIKE 'A%',  RG_First_Active_date__c = NULL</a:t>
                       </a:r>
                       <a:endParaRPr lang="en-US" sz="1050" dirty="0">
-                        <a:latin typeface="Malgun Gothic" charset="0"/>
-                        <a:ea typeface="Malgun Gothic" charset="0"/>
-                        <a:cs typeface="Malgun Gothic" charset="0"/>
+                        <a:latin typeface="Malgun Gothic" panose="020B0503020000020004" pitchFamily="34" charset="-127"/>
+                        <a:ea typeface="Malgun Gothic" panose="020B0503020000020004" pitchFamily="34" charset="-127"/>
+                        <a:cs typeface="Malgun Gothic" panose="020B0503020000020004" pitchFamily="34" charset="-127"/>
                       </a:endParaRPr>
                     </a:p>
                   </a:txBody>
@@ -10721,16 +10721,16 @@
                           <a:solidFill>
                             <a:srgbClr val="1F2937"/>
                           </a:solidFill>
-                          <a:latin typeface="Malgun Gothic" pitchFamily="34" charset="0"/>
-                          <a:ea typeface="Malgun Gothic" pitchFamily="34" charset="-122"/>
-                          <a:cs typeface="Malgun Gothic" pitchFamily="34" charset="-120"/>
+                          <a:latin typeface="Malgun Gothic" panose="020B0503020000020004" pitchFamily="34" charset="-127"/>
+                          <a:ea typeface="Malgun Gothic" panose="020B0503020000020004" pitchFamily="34" charset="-127"/>
+                          <a:cs typeface="Malgun Gothic" panose="020B0503020000020004" pitchFamily="34" charset="-127"/>
                         </a:rPr>
                         <a:t>RITM1369244 반영</a:t>
                       </a:r>
                       <a:endParaRPr lang="en-US" sz="1050" dirty="0">
-                        <a:latin typeface="Malgun Gothic" charset="0"/>
-                        <a:ea typeface="Malgun Gothic" charset="0"/>
-                        <a:cs typeface="Malgun Gothic" charset="0"/>
+                        <a:latin typeface="Malgun Gothic" panose="020B0503020000020004" pitchFamily="34" charset="-127"/>
+                        <a:ea typeface="Malgun Gothic" panose="020B0503020000020004" pitchFamily="34" charset="-127"/>
+                        <a:cs typeface="Malgun Gothic" panose="020B0503020000020004" pitchFamily="34" charset="-127"/>
                       </a:endParaRPr>
                     </a:p>
                   </a:txBody>
@@ -10791,16 +10791,16 @@
                           <a:solidFill>
                             <a:srgbClr val="1F2937"/>
                           </a:solidFill>
-                          <a:latin typeface="Malgun Gothic" pitchFamily="34" charset="0"/>
-                          <a:ea typeface="Malgun Gothic" pitchFamily="34" charset="-122"/>
-                          <a:cs typeface="Malgun Gothic" pitchFamily="34" charset="-120"/>
+                          <a:latin typeface="Malgun Gothic" panose="020B0503020000020004" pitchFamily="34" charset="-127"/>
+                          <a:ea typeface="Malgun Gothic" panose="020B0503020000020004" pitchFamily="34" charset="-127"/>
+                          <a:cs typeface="Malgun Gothic" panose="020B0503020000020004" pitchFamily="34" charset="-127"/>
                         </a:rPr>
                         <a:t>제외</a:t>
                       </a:r>
                       <a:endParaRPr lang="en-US" sz="1050" dirty="0">
-                        <a:latin typeface="Malgun Gothic" charset="0"/>
-                        <a:ea typeface="Malgun Gothic" charset="0"/>
-                        <a:cs typeface="Malgun Gothic" charset="0"/>
+                        <a:latin typeface="Malgun Gothic" panose="020B0503020000020004" pitchFamily="34" charset="-127"/>
+                        <a:ea typeface="Malgun Gothic" panose="020B0503020000020004" pitchFamily="34" charset="-127"/>
+                        <a:cs typeface="Malgun Gothic" panose="020B0503020000020004" pitchFamily="34" charset="-127"/>
                       </a:endParaRPr>
                     </a:p>
                   </a:txBody>
@@ -10859,16 +10859,16 @@
                           <a:solidFill>
                             <a:srgbClr val="1F2937"/>
                           </a:solidFill>
-                          <a:latin typeface="Malgun Gothic" pitchFamily="34" charset="0"/>
-                          <a:ea typeface="Malgun Gothic" pitchFamily="34" charset="-122"/>
-                          <a:cs typeface="Malgun Gothic" pitchFamily="34" charset="-120"/>
+                          <a:latin typeface="Malgun Gothic" panose="020B0503020000020004" pitchFamily="34" charset="-127"/>
+                          <a:ea typeface="Malgun Gothic" panose="020B0503020000020004" pitchFamily="34" charset="-127"/>
+                          <a:cs typeface="Malgun Gothic" panose="020B0503020000020004" pitchFamily="34" charset="-127"/>
                         </a:rPr>
                         <a:t>Account Name에 '유한회사' 포함</a:t>
                       </a:r>
                       <a:endParaRPr lang="en-US" sz="1050" dirty="0">
-                        <a:latin typeface="Malgun Gothic" charset="0"/>
-                        <a:ea typeface="Malgun Gothic" charset="0"/>
-                        <a:cs typeface="Malgun Gothic" charset="0"/>
+                        <a:latin typeface="Malgun Gothic" panose="020B0503020000020004" pitchFamily="34" charset="-127"/>
+                        <a:ea typeface="Malgun Gothic" panose="020B0503020000020004" pitchFamily="34" charset="-127"/>
+                        <a:cs typeface="Malgun Gothic" panose="020B0503020000020004" pitchFamily="34" charset="-127"/>
                       </a:endParaRPr>
                     </a:p>
                   </a:txBody>
@@ -10927,16 +10927,16 @@
                           <a:solidFill>
                             <a:srgbClr val="1F2937"/>
                           </a:solidFill>
-                          <a:latin typeface="Malgun Gothic" pitchFamily="34" charset="0"/>
-                          <a:ea typeface="Malgun Gothic" pitchFamily="34" charset="-122"/>
-                          <a:cs typeface="Malgun Gothic" pitchFamily="34" charset="-120"/>
+                          <a:latin typeface="Malgun Gothic" panose="020B0503020000020004" pitchFamily="34" charset="-127"/>
+                          <a:ea typeface="Malgun Gothic" panose="020B0503020000020004" pitchFamily="34" charset="-127"/>
+                          <a:cs typeface="Malgun Gothic" panose="020B0503020000020004" pitchFamily="34" charset="-127"/>
                         </a:rPr>
                         <a:t>execute 단계에서 제외 (9/3 추가 요청)</a:t>
                       </a:r>
                       <a:endParaRPr lang="en-US" sz="1050" dirty="0">
-                        <a:latin typeface="Malgun Gothic" charset="0"/>
-                        <a:ea typeface="Malgun Gothic" charset="0"/>
-                        <a:cs typeface="Malgun Gothic" charset="0"/>
+                        <a:latin typeface="Malgun Gothic" panose="020B0503020000020004" pitchFamily="34" charset="-127"/>
+                        <a:ea typeface="Malgun Gothic" panose="020B0503020000020004" pitchFamily="34" charset="-127"/>
+                        <a:cs typeface="Malgun Gothic" panose="020B0503020000020004" pitchFamily="34" charset="-127"/>
                       </a:endParaRPr>
                     </a:p>
                   </a:txBody>
@@ -11874,16 +11874,16 @@
                           <a:solidFill>
                             <a:srgbClr val="FFFFFF"/>
                           </a:solidFill>
-                          <a:latin typeface="Malgun Gothic" pitchFamily="34" charset="0"/>
-                          <a:ea typeface="Malgun Gothic" pitchFamily="34" charset="-122"/>
-                          <a:cs typeface="Malgun Gothic" pitchFamily="34" charset="-120"/>
+                          <a:latin typeface="Malgun Gothic" panose="020B0503020000020004" pitchFamily="34" charset="-127"/>
+                          <a:ea typeface="Malgun Gothic" panose="020B0503020000020004" pitchFamily="34" charset="-127"/>
+                          <a:cs typeface="Malgun Gothic" panose="020B0503020000020004" pitchFamily="34" charset="-127"/>
                         </a:rPr>
                         <a:t>필드</a:t>
                       </a:r>
                       <a:endParaRPr lang="en-US" sz="1100" dirty="0">
-                        <a:latin typeface="Malgun Gothic" charset="0"/>
-                        <a:ea typeface="Malgun Gothic" charset="0"/>
-                        <a:cs typeface="Malgun Gothic" charset="0"/>
+                        <a:latin typeface="Malgun Gothic" panose="020B0503020000020004" pitchFamily="34" charset="-127"/>
+                        <a:ea typeface="Malgun Gothic" panose="020B0503020000020004" pitchFamily="34" charset="-127"/>
+                        <a:cs typeface="Malgun Gothic" panose="020B0503020000020004" pitchFamily="34" charset="-127"/>
                       </a:endParaRPr>
                     </a:p>
                   </a:txBody>
@@ -11942,16 +11942,16 @@
                           <a:solidFill>
                             <a:srgbClr val="FFFFFF"/>
                           </a:solidFill>
-                          <a:latin typeface="Malgun Gothic" pitchFamily="34" charset="0"/>
-                          <a:ea typeface="Malgun Gothic" pitchFamily="34" charset="-122"/>
-                          <a:cs typeface="Malgun Gothic" pitchFamily="34" charset="-120"/>
+                          <a:latin typeface="Malgun Gothic" panose="020B0503020000020004" pitchFamily="34" charset="-127"/>
+                          <a:ea typeface="Malgun Gothic" panose="020B0503020000020004" pitchFamily="34" charset="-127"/>
+                          <a:cs typeface="Malgun Gothic" panose="020B0503020000020004" pitchFamily="34" charset="-127"/>
                         </a:rPr>
                         <a:t>값</a:t>
                       </a:r>
                       <a:endParaRPr lang="en-US" sz="1100" dirty="0">
-                        <a:latin typeface="Malgun Gothic" charset="0"/>
-                        <a:ea typeface="Malgun Gothic" charset="0"/>
-                        <a:cs typeface="Malgun Gothic" charset="0"/>
+                        <a:latin typeface="Malgun Gothic" panose="020B0503020000020004" pitchFamily="34" charset="-127"/>
+                        <a:ea typeface="Malgun Gothic" panose="020B0503020000020004" pitchFamily="34" charset="-127"/>
+                        <a:cs typeface="Malgun Gothic" panose="020B0503020000020004" pitchFamily="34" charset="-127"/>
                       </a:endParaRPr>
                     </a:p>
                   </a:txBody>
@@ -12012,16 +12012,16 @@
                           <a:solidFill>
                             <a:srgbClr val="1F2937"/>
                           </a:solidFill>
-                          <a:latin typeface="Malgun Gothic" pitchFamily="34" charset="0"/>
-                          <a:ea typeface="Malgun Gothic" pitchFamily="34" charset="-122"/>
-                          <a:cs typeface="Malgun Gothic" pitchFamily="34" charset="-120"/>
+                          <a:latin typeface="Malgun Gothic" panose="020B0503020000020004" pitchFamily="34" charset="-127"/>
+                          <a:ea typeface="Malgun Gothic" panose="020B0503020000020004" pitchFamily="34" charset="-127"/>
+                          <a:cs typeface="Malgun Gothic" panose="020B0503020000020004" pitchFamily="34" charset="-127"/>
                         </a:rPr>
                         <a:t>Record Type</a:t>
                       </a:r>
                       <a:endParaRPr lang="en-US" sz="1050" dirty="0">
-                        <a:latin typeface="Malgun Gothic" charset="0"/>
-                        <a:ea typeface="Malgun Gothic" charset="0"/>
-                        <a:cs typeface="Malgun Gothic" charset="0"/>
+                        <a:latin typeface="Malgun Gothic" panose="020B0503020000020004" pitchFamily="34" charset="-127"/>
+                        <a:ea typeface="Malgun Gothic" panose="020B0503020000020004" pitchFamily="34" charset="-127"/>
+                        <a:cs typeface="Malgun Gothic" panose="020B0503020000020004" pitchFamily="34" charset="-127"/>
                       </a:endParaRPr>
                     </a:p>
                   </a:txBody>
@@ -12080,16 +12080,16 @@
                           <a:solidFill>
                             <a:srgbClr val="1F2937"/>
                           </a:solidFill>
-                          <a:latin typeface="Malgun Gothic" pitchFamily="34" charset="0"/>
-                          <a:ea typeface="Malgun Gothic" pitchFamily="34" charset="-122"/>
-                          <a:cs typeface="Malgun Gothic" pitchFamily="34" charset="-120"/>
+                          <a:latin typeface="Malgun Gothic" panose="020B0503020000020004" pitchFamily="34" charset="-127"/>
+                          <a:ea typeface="Malgun Gothic" panose="020B0503020000020004" pitchFamily="34" charset="-127"/>
+                          <a:cs typeface="Malgun Gothic" panose="020B0503020000020004" pitchFamily="34" charset="-127"/>
                         </a:rPr>
                         <a:t>3P MM Common (X3P_MM_Common)</a:t>
                       </a:r>
                       <a:endParaRPr lang="en-US" sz="1050" dirty="0">
-                        <a:latin typeface="Malgun Gothic" charset="0"/>
-                        <a:ea typeface="Malgun Gothic" charset="0"/>
-                        <a:cs typeface="Malgun Gothic" charset="0"/>
+                        <a:latin typeface="Malgun Gothic" panose="020B0503020000020004" pitchFamily="34" charset="-127"/>
+                        <a:ea typeface="Malgun Gothic" panose="020B0503020000020004" pitchFamily="34" charset="-127"/>
+                        <a:cs typeface="Malgun Gothic" panose="020B0503020000020004" pitchFamily="34" charset="-127"/>
                       </a:endParaRPr>
                     </a:p>
                   </a:txBody>
@@ -12150,16 +12150,16 @@
                           <a:solidFill>
                             <a:srgbClr val="1F2937"/>
                           </a:solidFill>
-                          <a:latin typeface="Malgun Gothic" pitchFamily="34" charset="0"/>
-                          <a:ea typeface="Malgun Gothic" pitchFamily="34" charset="-122"/>
-                          <a:cs typeface="Malgun Gothic" pitchFamily="34" charset="-120"/>
+                          <a:latin typeface="Malgun Gothic" panose="020B0503020000020004" pitchFamily="34" charset="-127"/>
+                          <a:ea typeface="Malgun Gothic" panose="020B0503020000020004" pitchFamily="34" charset="-127"/>
+                          <a:cs typeface="Malgun Gothic" panose="020B0503020000020004" pitchFamily="34" charset="-127"/>
                         </a:rPr>
                         <a:t>Name</a:t>
                       </a:r>
                       <a:endParaRPr lang="en-US" sz="1050" dirty="0">
-                        <a:latin typeface="Malgun Gothic" charset="0"/>
-                        <a:ea typeface="Malgun Gothic" charset="0"/>
-                        <a:cs typeface="Malgun Gothic" charset="0"/>
+                        <a:latin typeface="Malgun Gothic" panose="020B0503020000020004" pitchFamily="34" charset="-127"/>
+                        <a:ea typeface="Malgun Gothic" panose="020B0503020000020004" pitchFamily="34" charset="-127"/>
+                        <a:cs typeface="Malgun Gothic" panose="020B0503020000020004" pitchFamily="34" charset="-127"/>
                       </a:endParaRPr>
                     </a:p>
                   </a:txBody>
@@ -12218,16 +12218,16 @@
                           <a:solidFill>
                             <a:srgbClr val="1F2937"/>
                           </a:solidFill>
-                          <a:latin typeface="Malgun Gothic" pitchFamily="34" charset="0"/>
-                          <a:ea typeface="Malgun Gothic" pitchFamily="34" charset="-122"/>
-                          <a:cs typeface="Malgun Gothic" pitchFamily="34" charset="-120"/>
+                          <a:latin typeface="Malgun Gothic" panose="020B0503020000020004" pitchFamily="34" charset="-127"/>
+                          <a:ea typeface="Malgun Gothic" panose="020B0503020000020004" pitchFamily="34" charset="-127"/>
+                          <a:cs typeface="Malgun Gothic" panose="020B0503020000020004" pitchFamily="34" charset="-127"/>
                         </a:rPr>
                         <a:t>{Account명}_SSR-Active 2_{yyyy-MM-dd}  (120자 초과 시 Account명 축약)</a:t>
                       </a:r>
                       <a:endParaRPr lang="en-US" sz="1050" dirty="0">
-                        <a:latin typeface="Malgun Gothic" charset="0"/>
-                        <a:ea typeface="Malgun Gothic" charset="0"/>
-                        <a:cs typeface="Malgun Gothic" charset="0"/>
+                        <a:latin typeface="Malgun Gothic" panose="020B0503020000020004" pitchFamily="34" charset="-127"/>
+                        <a:ea typeface="Malgun Gothic" panose="020B0503020000020004" pitchFamily="34" charset="-127"/>
+                        <a:cs typeface="Malgun Gothic" panose="020B0503020000020004" pitchFamily="34" charset="-127"/>
                       </a:endParaRPr>
                     </a:p>
                   </a:txBody>
@@ -12288,16 +12288,16 @@
                           <a:solidFill>
                             <a:srgbClr val="1F2937"/>
                           </a:solidFill>
-                          <a:latin typeface="Malgun Gothic" pitchFamily="34" charset="0"/>
-                          <a:ea typeface="Malgun Gothic" pitchFamily="34" charset="-122"/>
-                          <a:cs typeface="Malgun Gothic" pitchFamily="34" charset="-120"/>
+                          <a:latin typeface="Malgun Gothic" panose="020B0503020000020004" pitchFamily="34" charset="-127"/>
+                          <a:ea typeface="Malgun Gothic" panose="020B0503020000020004" pitchFamily="34" charset="-127"/>
+                          <a:cs typeface="Malgun Gothic" panose="020B0503020000020004" pitchFamily="34" charset="-127"/>
                         </a:rPr>
                         <a:t>Owner</a:t>
                       </a:r>
                       <a:endParaRPr lang="en-US" sz="1050" dirty="0">
-                        <a:latin typeface="Malgun Gothic" charset="0"/>
-                        <a:ea typeface="Malgun Gothic" charset="0"/>
-                        <a:cs typeface="Malgun Gothic" charset="0"/>
+                        <a:latin typeface="Malgun Gothic" panose="020B0503020000020004" pitchFamily="34" charset="-127"/>
+                        <a:ea typeface="Malgun Gothic" panose="020B0503020000020004" pitchFamily="34" charset="-127"/>
+                        <a:cs typeface="Malgun Gothic" panose="020B0503020000020004" pitchFamily="34" charset="-127"/>
                       </a:endParaRPr>
                     </a:p>
                   </a:txBody>
@@ -12356,16 +12356,16 @@
                           <a:solidFill>
                             <a:srgbClr val="1F2937"/>
                           </a:solidFill>
-                          <a:latin typeface="Malgun Gothic" pitchFamily="34" charset="0"/>
-                          <a:ea typeface="Malgun Gothic" pitchFamily="34" charset="-122"/>
-                          <a:cs typeface="Malgun Gothic" pitchFamily="34" charset="-120"/>
+                          <a:latin typeface="Malgun Gothic" panose="020B0503020000020004" pitchFamily="34" charset="-127"/>
+                          <a:ea typeface="Malgun Gothic" panose="020B0503020000020004" pitchFamily="34" charset="-127"/>
+                          <a:cs typeface="Malgun Gothic" panose="020B0503020000020004" pitchFamily="34" charset="-127"/>
                         </a:rPr>
                         <a:t>Allocator가 배정한 사용자</a:t>
                       </a:r>
                       <a:endParaRPr lang="en-US" sz="1050" dirty="0">
-                        <a:latin typeface="Malgun Gothic" charset="0"/>
-                        <a:ea typeface="Malgun Gothic" charset="0"/>
-                        <a:cs typeface="Malgun Gothic" charset="0"/>
+                        <a:latin typeface="Malgun Gothic" panose="020B0503020000020004" pitchFamily="34" charset="-127"/>
+                        <a:ea typeface="Malgun Gothic" panose="020B0503020000020004" pitchFamily="34" charset="-127"/>
+                        <a:cs typeface="Malgun Gothic" panose="020B0503020000020004" pitchFamily="34" charset="-127"/>
                       </a:endParaRPr>
                     </a:p>
                   </a:txBody>
@@ -12426,16 +12426,16 @@
                           <a:solidFill>
                             <a:srgbClr val="1F2937"/>
                           </a:solidFill>
-                          <a:latin typeface="Malgun Gothic" pitchFamily="34" charset="0"/>
-                          <a:ea typeface="Malgun Gothic" pitchFamily="34" charset="-122"/>
-                          <a:cs typeface="Malgun Gothic" pitchFamily="34" charset="-120"/>
+                          <a:latin typeface="Malgun Gothic" panose="020B0503020000020004" pitchFamily="34" charset="-127"/>
+                          <a:ea typeface="Malgun Gothic" panose="020B0503020000020004" pitchFamily="34" charset="-127"/>
+                          <a:cs typeface="Malgun Gothic" panose="020B0503020000020004" pitchFamily="34" charset="-127"/>
                         </a:rPr>
                         <a:t>MM_Priority__c</a:t>
                       </a:r>
                       <a:endParaRPr lang="en-US" sz="1050" dirty="0">
-                        <a:latin typeface="Malgun Gothic" charset="0"/>
-                        <a:ea typeface="Malgun Gothic" charset="0"/>
-                        <a:cs typeface="Malgun Gothic" charset="0"/>
+                        <a:latin typeface="Malgun Gothic" panose="020B0503020000020004" pitchFamily="34" charset="-127"/>
+                        <a:ea typeface="Malgun Gothic" panose="020B0503020000020004" pitchFamily="34" charset="-127"/>
+                        <a:cs typeface="Malgun Gothic" panose="020B0503020000020004" pitchFamily="34" charset="-127"/>
                       </a:endParaRPr>
                     </a:p>
                   </a:txBody>
@@ -12494,16 +12494,16 @@
                           <a:solidFill>
                             <a:srgbClr val="1F2937"/>
                           </a:solidFill>
-                          <a:latin typeface="Malgun Gothic" pitchFamily="34" charset="0"/>
-                          <a:ea typeface="Malgun Gothic" pitchFamily="34" charset="-122"/>
-                          <a:cs typeface="Malgun Gothic" pitchFamily="34" charset="-120"/>
+                          <a:latin typeface="Malgun Gothic" panose="020B0503020000020004" pitchFamily="34" charset="-127"/>
+                          <a:ea typeface="Malgun Gothic" panose="020B0503020000020004" pitchFamily="34" charset="-127"/>
+                          <a:cs typeface="Malgun Gothic" panose="020B0503020000020004" pitchFamily="34" charset="-127"/>
                         </a:rPr>
                         <a:t>SSR-Active 2</a:t>
                       </a:r>
                       <a:endParaRPr lang="en-US" sz="1050" dirty="0">
-                        <a:latin typeface="Malgun Gothic" charset="0"/>
-                        <a:ea typeface="Malgun Gothic" charset="0"/>
-                        <a:cs typeface="Malgun Gothic" charset="0"/>
+                        <a:latin typeface="Malgun Gothic" panose="020B0503020000020004" pitchFamily="34" charset="-127"/>
+                        <a:ea typeface="Malgun Gothic" panose="020B0503020000020004" pitchFamily="34" charset="-127"/>
+                        <a:cs typeface="Malgun Gothic" panose="020B0503020000020004" pitchFamily="34" charset="-127"/>
                       </a:endParaRPr>
                     </a:p>
                   </a:txBody>
@@ -12564,16 +12564,16 @@
                           <a:solidFill>
                             <a:srgbClr val="1F2937"/>
                           </a:solidFill>
-                          <a:latin typeface="Malgun Gothic" pitchFamily="34" charset="0"/>
-                          <a:ea typeface="Malgun Gothic" pitchFamily="34" charset="-122"/>
-                          <a:cs typeface="Malgun Gothic" pitchFamily="34" charset="-120"/>
+                          <a:latin typeface="Malgun Gothic" panose="020B0503020000020004" pitchFamily="34" charset="-127"/>
+                          <a:ea typeface="Malgun Gothic" panose="020B0503020000020004" pitchFamily="34" charset="-127"/>
+                          <a:cs typeface="Malgun Gothic" panose="020B0503020000020004" pitchFamily="34" charset="-127"/>
                         </a:rPr>
                         <a:t>Task__c</a:t>
                       </a:r>
                       <a:endParaRPr lang="en-US" sz="1050" dirty="0">
-                        <a:latin typeface="Malgun Gothic" charset="0"/>
-                        <a:ea typeface="Malgun Gothic" charset="0"/>
-                        <a:cs typeface="Malgun Gothic" charset="0"/>
+                        <a:latin typeface="Malgun Gothic" panose="020B0503020000020004" pitchFamily="34" charset="-127"/>
+                        <a:ea typeface="Malgun Gothic" panose="020B0503020000020004" pitchFamily="34" charset="-127"/>
+                        <a:cs typeface="Malgun Gothic" panose="020B0503020000020004" pitchFamily="34" charset="-127"/>
                       </a:endParaRPr>
                     </a:p>
                   </a:txBody>
@@ -12632,16 +12632,16 @@
                           <a:solidFill>
                             <a:srgbClr val="1F2937"/>
                           </a:solidFill>
-                          <a:latin typeface="Malgun Gothic" pitchFamily="34" charset="0"/>
-                          <a:ea typeface="Malgun Gothic" pitchFamily="34" charset="-122"/>
-                          <a:cs typeface="Malgun Gothic" pitchFamily="34" charset="-120"/>
+                          <a:latin typeface="Malgun Gothic" panose="020B0503020000020004" pitchFamily="34" charset="-127"/>
+                          <a:ea typeface="Malgun Gothic" panose="020B0503020000020004" pitchFamily="34" charset="-127"/>
+                          <a:cs typeface="Malgun Gothic" panose="020B0503020000020004" pitchFamily="34" charset="-127"/>
                         </a:rPr>
                         <a:t>생성일 (Task 할당일)</a:t>
                       </a:r>
                       <a:endParaRPr lang="en-US" sz="1050" dirty="0">
-                        <a:latin typeface="Malgun Gothic" charset="0"/>
-                        <a:ea typeface="Malgun Gothic" charset="0"/>
-                        <a:cs typeface="Malgun Gothic" charset="0"/>
+                        <a:latin typeface="Malgun Gothic" panose="020B0503020000020004" pitchFamily="34" charset="-127"/>
+                        <a:ea typeface="Malgun Gothic" panose="020B0503020000020004" pitchFamily="34" charset="-127"/>
+                        <a:cs typeface="Malgun Gothic" panose="020B0503020000020004" pitchFamily="34" charset="-127"/>
                       </a:endParaRPr>
                     </a:p>
                   </a:txBody>
@@ -12702,16 +12702,16 @@
                           <a:solidFill>
                             <a:srgbClr val="1F2937"/>
                           </a:solidFill>
-                          <a:latin typeface="Malgun Gothic" pitchFamily="34" charset="0"/>
-                          <a:ea typeface="Malgun Gothic" pitchFamily="34" charset="-122"/>
-                          <a:cs typeface="Malgun Gothic" pitchFamily="34" charset="-120"/>
+                          <a:latin typeface="Malgun Gothic" panose="020B0503020000020004" pitchFamily="34" charset="-127"/>
+                          <a:ea typeface="Malgun Gothic" panose="020B0503020000020004" pitchFamily="34" charset="-127"/>
+                          <a:cs typeface="Malgun Gothic" panose="020B0503020000020004" pitchFamily="34" charset="-127"/>
                         </a:rPr>
                         <a:t>Close Date</a:t>
                       </a:r>
                       <a:endParaRPr lang="en-US" sz="1050" dirty="0">
-                        <a:latin typeface="Malgun Gothic" charset="0"/>
-                        <a:ea typeface="Malgun Gothic" charset="0"/>
-                        <a:cs typeface="Malgun Gothic" charset="0"/>
+                        <a:latin typeface="Malgun Gothic" panose="020B0503020000020004" pitchFamily="34" charset="-127"/>
+                        <a:ea typeface="Malgun Gothic" panose="020B0503020000020004" pitchFamily="34" charset="-127"/>
+                        <a:cs typeface="Malgun Gothic" panose="020B0503020000020004" pitchFamily="34" charset="-127"/>
                       </a:endParaRPr>
                     </a:p>
                   </a:txBody>
@@ -12770,16 +12770,16 @@
                           <a:solidFill>
                             <a:srgbClr val="1F2937"/>
                           </a:solidFill>
-                          <a:latin typeface="Malgun Gothic" pitchFamily="34" charset="0"/>
-                          <a:ea typeface="Malgun Gothic" pitchFamily="34" charset="-122"/>
-                          <a:cs typeface="Malgun Gothic" pitchFamily="34" charset="-120"/>
+                          <a:latin typeface="Malgun Gothic" panose="020B0503020000020004" pitchFamily="34" charset="-127"/>
+                          <a:ea typeface="Malgun Gothic" panose="020B0503020000020004" pitchFamily="34" charset="-127"/>
+                          <a:cs typeface="Malgun Gothic" panose="020B0503020000020004" pitchFamily="34" charset="-127"/>
                         </a:rPr>
                         <a:t>생성일 + 21일</a:t>
                       </a:r>
                       <a:endParaRPr lang="en-US" sz="1050" dirty="0">
-                        <a:latin typeface="Malgun Gothic" charset="0"/>
-                        <a:ea typeface="Malgun Gothic" charset="0"/>
-                        <a:cs typeface="Malgun Gothic" charset="0"/>
+                        <a:latin typeface="Malgun Gothic" panose="020B0503020000020004" pitchFamily="34" charset="-127"/>
+                        <a:ea typeface="Malgun Gothic" panose="020B0503020000020004" pitchFamily="34" charset="-127"/>
+                        <a:cs typeface="Malgun Gothic" panose="020B0503020000020004" pitchFamily="34" charset="-127"/>
                       </a:endParaRPr>
                     </a:p>
                   </a:txBody>
@@ -12840,16 +12840,16 @@
                           <a:solidFill>
                             <a:srgbClr val="1F2937"/>
                           </a:solidFill>
-                          <a:latin typeface="Malgun Gothic" pitchFamily="34" charset="0"/>
-                          <a:ea typeface="Malgun Gothic" pitchFamily="34" charset="-122"/>
-                          <a:cs typeface="Malgun Gothic" pitchFamily="34" charset="-120"/>
+                          <a:latin typeface="Malgun Gothic" panose="020B0503020000020004" pitchFamily="34" charset="-127"/>
+                          <a:ea typeface="Malgun Gothic" panose="020B0503020000020004" pitchFamily="34" charset="-127"/>
+                          <a:cs typeface="Malgun Gothic" panose="020B0503020000020004" pitchFamily="34" charset="-127"/>
                         </a:rPr>
                         <a:t>Stage</a:t>
                       </a:r>
                       <a:endParaRPr lang="en-US" sz="1050" dirty="0">
-                        <a:latin typeface="Malgun Gothic" charset="0"/>
-                        <a:ea typeface="Malgun Gothic" charset="0"/>
-                        <a:cs typeface="Malgun Gothic" charset="0"/>
+                        <a:latin typeface="Malgun Gothic" panose="020B0503020000020004" pitchFamily="34" charset="-127"/>
+                        <a:ea typeface="Malgun Gothic" panose="020B0503020000020004" pitchFamily="34" charset="-127"/>
+                        <a:cs typeface="Malgun Gothic" panose="020B0503020000020004" pitchFamily="34" charset="-127"/>
                       </a:endParaRPr>
                     </a:p>
                   </a:txBody>
@@ -12908,16 +12908,16 @@
                           <a:solidFill>
                             <a:srgbClr val="1F2937"/>
                           </a:solidFill>
-                          <a:latin typeface="Malgun Gothic" pitchFamily="34" charset="0"/>
-                          <a:ea typeface="Malgun Gothic" pitchFamily="34" charset="-122"/>
-                          <a:cs typeface="Malgun Gothic" pitchFamily="34" charset="-120"/>
+                          <a:latin typeface="Malgun Gothic" panose="020B0503020000020004" pitchFamily="34" charset="-127"/>
+                          <a:ea typeface="Malgun Gothic" panose="020B0503020000020004" pitchFamily="34" charset="-127"/>
+                          <a:cs typeface="Malgun Gothic" panose="020B0503020000020004" pitchFamily="34" charset="-127"/>
                         </a:rPr>
                         <a:t>진행 중(In Process)</a:t>
                       </a:r>
                       <a:endParaRPr lang="en-US" sz="1050" dirty="0">
-                        <a:latin typeface="Malgun Gothic" charset="0"/>
-                        <a:ea typeface="Malgun Gothic" charset="0"/>
-                        <a:cs typeface="Malgun Gothic" charset="0"/>
+                        <a:latin typeface="Malgun Gothic" panose="020B0503020000020004" pitchFamily="34" charset="-127"/>
+                        <a:ea typeface="Malgun Gothic" panose="020B0503020000020004" pitchFamily="34" charset="-127"/>
+                        <a:cs typeface="Malgun Gothic" panose="020B0503020000020004" pitchFamily="34" charset="-127"/>
                       </a:endParaRPr>
                     </a:p>
                   </a:txBody>
@@ -14981,7 +14981,7 @@
     </a:clrScheme>
     <a:fontScheme name="Active Assignment">
       <a:majorFont>
-        <a:latin typeface="Malgun Gothic"/>
+        <a:latin typeface="Malgun Gothic" panose="020B0503020000020004" pitchFamily="34" charset="-127"/>
         <a:ea typeface=""/>
         <a:cs typeface=""/>
         <a:font script="Jpan" typeface="游ゴシック Light"/>
@@ -15033,7 +15033,7 @@
         <a:font script="Tfng" typeface="Ebrima"/>
       </a:majorFont>
       <a:minorFont>
-        <a:latin typeface="Malgun Gothic"/>
+        <a:latin typeface="Malgun Gothic" panose="020B0503020000020004" pitchFamily="34" charset="-127"/>
         <a:ea typeface=""/>
         <a:cs typeface=""/>
         <a:font script="Jpan" typeface="游ゴシック"/>
